--- a/materialien/Videos/04_XOR_OTP_Blockchiffren/KR_Video_04_XOR_OTP_Blockchiffren_Folien.pptx
+++ b/materialien/Videos/04_XOR_OTP_Blockchiffren/KR_Video_04_XOR_OTP_Blockchiffren_Folien.pptx
@@ -123,58 +123,58 @@
   <p:extLst>
     <p:ext uri="{521415D9-36F7-43E2-AB2F-B90AF26B5E84}">
       <p14:sectionLst xmlns:p14="http://schemas.microsoft.com/office/powerpoint/2010/main">
-        <p14:section name="Einstieg" id="{a5bf788d-77af-fb29-c496-86577fcdbf32}">
+        <p14:section name="Einstieg" id="{3ef9a674-822d-f2a4-8387-2d18f43422e4}">
           <p14:sldIdLst>
             <p14:sldId id="256"/>
             <p14:sldId id="257"/>
           </p14:sldIdLst>
         </p14:section>
-        <p14:section name="ASCII und XOR" id="{1295eb40-be43-4ce8-cc4b-acf2f534f285}">
+        <p14:section name="ASCII und XOR" id="{949664e7-7d3f-9080-594c-f75be8ea4e22}">
           <p14:sldIdLst>
             <p14:sldId id="258"/>
             <p14:sldId id="259"/>
           </p14:sldIdLst>
         </p14:section>
-        <p14:section name="One-Time-Pad" id="{35bc7644-1657-9491-8f6f-0b5091a2e803}">
+        <p14:section name="One-Time-Pad" id="{8f2777f0-0541-ad71-1385-808df4d149c6}">
           <p14:sldIdLst>
             <p14:sldId id="260"/>
           </p14:sldIdLst>
         </p14:section>
-        <p14:section name="Der doppelte Schlüssel" id="{6a92a3e7-60dc-9ab9-ff6a-850ce8baacf7}">
+        <p14:section name="Der doppelte Schlüssel" id="{1f3ddbd1-f2eb-22c8-9a47-be0863a66a6e}">
           <p14:sldIdLst>
             <p14:sldId id="261"/>
           </p14:sldIdLst>
         </p14:section>
-        <p14:section name="Selbst ausprobieren" id="{90771118-b9d1-0206-aa48-8f0587c1f250}">
+        <p14:section name="Selbst ausprobieren" id="{b5dcd3b1-7758-22be-d57d-d805375e9030}">
           <p14:sldIdLst>
             <p14:sldId id="262"/>
             <p14:sldId id="263"/>
           </p14:sldIdLst>
         </p14:section>
-        <p14:section name="Blockchiffre" id="{1a0c96a6-52fd-fab8-9432-6592deb2244e}">
+        <p14:section name="Blockchiffre" id="{4c315e81-81e9-6f9d-9131-6f130c483a8d}">
           <p14:sldIdLst>
             <p14:sldId id="264"/>
             <p14:sldId id="265"/>
             <p14:sldId id="266"/>
           </p14:sldIdLst>
         </p14:section>
-        <p14:section name="Lawineneffekt" id="{009e29bc-2bf8-c500-3ede-be8152791ec6}">
+        <p14:section name="Lawineneffekt" id="{a46af21d-e9b9-a39d-6e82-388a58dbecc3}">
           <p14:sldIdLst>
             <p14:sldId id="267"/>
             <p14:sldId id="268"/>
           </p14:sldIdLst>
         </p14:section>
-        <p14:section name="ECB und CBC" id="{4b3bf04f-f25c-e443-0d85-eaf37318e5b0}">
+        <p14:section name="ECB und CBC" id="{804dd822-3961-435f-5a9d-e61fa00edac4}">
           <p14:sldIdLst>
             <p14:sldId id="269"/>
           </p14:sldIdLst>
         </p14:section>
-        <p14:section name="Typische Fehler" id="{abf3a93c-2ead-f284-1f65-564a2003f6c3}">
+        <p14:section name="Typische Fehler" id="{6f398573-10da-9b79-00f8-04b0f5b858e2}">
           <p14:sldIdLst>
             <p14:sldId id="270"/>
           </p14:sldIdLst>
         </p14:section>
-        <p14:section name="Zusammenfassung" id="{b63df307-3c1b-6317-f524-3ff672078249}">
+        <p14:section name="Zusammenfassung" id="{7a7c9e6a-8307-8bb5-f2f7-3573a87d1ce3}">
           <p14:sldIdLst>
             <p14:sldId id="271"/>
             <p14:sldId id="272"/>
@@ -3485,7 +3485,7 @@
                         <a:buNone/>
                       </a:pPr>
                       <a:r>
-                        <a:rPr lang="en-US" sz="1300" b="1" dirty="0">
+                        <a:rPr lang="en-US" sz="1400" b="1" dirty="0">
                           <a:solidFill>
                             <a:srgbClr val="1B1B1F"/>
                           </a:solidFill>
@@ -3495,7 +3495,7 @@
                         </a:rPr>
                         <a:t>ein</a:t>
                       </a:r>
-                      <a:endParaRPr lang="en-US" sz="1300" dirty="0">
+                      <a:endParaRPr lang="en-US" sz="1400" dirty="0">
                         <a:latin typeface="Calibri" charset="0"/>
                         <a:ea typeface="Calibri" charset="0"/>
                         <a:cs typeface="Calibri" charset="0"/>
@@ -3553,7 +3553,7 @@
                         <a:buNone/>
                       </a:pPr>
                       <a:r>
-                        <a:rPr lang="en-US" sz="1300" b="1" dirty="0">
+                        <a:rPr lang="en-US" sz="1400" b="1" dirty="0">
                           <a:solidFill>
                             <a:srgbClr val="1B1B1F"/>
                           </a:solidFill>
@@ -3563,7 +3563,7 @@
                         </a:rPr>
                         <a:t>0</a:t>
                       </a:r>
-                      <a:endParaRPr lang="en-US" sz="1300" dirty="0">
+                      <a:endParaRPr lang="en-US" sz="1400" dirty="0">
                         <a:latin typeface="Calibri" charset="0"/>
                         <a:ea typeface="Calibri" charset="0"/>
                         <a:cs typeface="Calibri" charset="0"/>
@@ -3621,7 +3621,7 @@
                         <a:buNone/>
                       </a:pPr>
                       <a:r>
-                        <a:rPr lang="en-US" sz="1300" b="1" dirty="0">
+                        <a:rPr lang="en-US" sz="1400" b="1" dirty="0">
                           <a:solidFill>
                             <a:srgbClr val="1B1B1F"/>
                           </a:solidFill>
@@ -3631,7 +3631,7 @@
                         </a:rPr>
                         <a:t>1</a:t>
                       </a:r>
-                      <a:endParaRPr lang="en-US" sz="1300" dirty="0">
+                      <a:endParaRPr lang="en-US" sz="1400" dirty="0">
                         <a:latin typeface="Calibri" charset="0"/>
                         <a:ea typeface="Calibri" charset="0"/>
                         <a:cs typeface="Calibri" charset="0"/>
@@ -3689,7 +3689,7 @@
                         <a:buNone/>
                       </a:pPr>
                       <a:r>
-                        <a:rPr lang="en-US" sz="1300" b="1" dirty="0">
+                        <a:rPr lang="en-US" sz="1400" b="1" dirty="0">
                           <a:solidFill>
                             <a:srgbClr val="1B1B1F"/>
                           </a:solidFill>
@@ -3699,7 +3699,7 @@
                         </a:rPr>
                         <a:t>2</a:t>
                       </a:r>
-                      <a:endParaRPr lang="en-US" sz="1300" dirty="0">
+                      <a:endParaRPr lang="en-US" sz="1400" dirty="0">
                         <a:latin typeface="Calibri" charset="0"/>
                         <a:ea typeface="Calibri" charset="0"/>
                         <a:cs typeface="Calibri" charset="0"/>
@@ -3757,7 +3757,7 @@
                         <a:buNone/>
                       </a:pPr>
                       <a:r>
-                        <a:rPr lang="en-US" sz="1300" b="1" dirty="0">
+                        <a:rPr lang="en-US" sz="1400" b="1" dirty="0">
                           <a:solidFill>
                             <a:srgbClr val="1B1B1F"/>
                           </a:solidFill>
@@ -3767,7 +3767,7 @@
                         </a:rPr>
                         <a:t>3</a:t>
                       </a:r>
-                      <a:endParaRPr lang="en-US" sz="1300" dirty="0">
+                      <a:endParaRPr lang="en-US" sz="1400" dirty="0">
                         <a:latin typeface="Calibri" charset="0"/>
                         <a:ea typeface="Calibri" charset="0"/>
                         <a:cs typeface="Calibri" charset="0"/>
@@ -3825,7 +3825,7 @@
                         <a:buNone/>
                       </a:pPr>
                       <a:r>
-                        <a:rPr lang="en-US" sz="1300" b="1" dirty="0">
+                        <a:rPr lang="en-US" sz="1400" b="1" dirty="0">
                           <a:solidFill>
                             <a:srgbClr val="1B1B1F"/>
                           </a:solidFill>
@@ -3835,7 +3835,7 @@
                         </a:rPr>
                         <a:t>4</a:t>
                       </a:r>
-                      <a:endParaRPr lang="en-US" sz="1300" dirty="0">
+                      <a:endParaRPr lang="en-US" sz="1400" dirty="0">
                         <a:latin typeface="Calibri" charset="0"/>
                         <a:ea typeface="Calibri" charset="0"/>
                         <a:cs typeface="Calibri" charset="0"/>
@@ -3893,7 +3893,7 @@
                         <a:buNone/>
                       </a:pPr>
                       <a:r>
-                        <a:rPr lang="en-US" sz="1300" b="1" dirty="0">
+                        <a:rPr lang="en-US" sz="1400" b="1" dirty="0">
                           <a:solidFill>
                             <a:srgbClr val="1B1B1F"/>
                           </a:solidFill>
@@ -3903,7 +3903,7 @@
                         </a:rPr>
                         <a:t>5</a:t>
                       </a:r>
-                      <a:endParaRPr lang="en-US" sz="1300" dirty="0">
+                      <a:endParaRPr lang="en-US" sz="1400" dirty="0">
                         <a:latin typeface="Calibri" charset="0"/>
                         <a:ea typeface="Calibri" charset="0"/>
                         <a:cs typeface="Calibri" charset="0"/>
@@ -3961,7 +3961,7 @@
                         <a:buNone/>
                       </a:pPr>
                       <a:r>
-                        <a:rPr lang="en-US" sz="1300" b="1" dirty="0">
+                        <a:rPr lang="en-US" sz="1400" b="1" dirty="0">
                           <a:solidFill>
                             <a:srgbClr val="1B1B1F"/>
                           </a:solidFill>
@@ -3971,7 +3971,7 @@
                         </a:rPr>
                         <a:t>6</a:t>
                       </a:r>
-                      <a:endParaRPr lang="en-US" sz="1300" dirty="0">
+                      <a:endParaRPr lang="en-US" sz="1400" dirty="0">
                         <a:latin typeface="Calibri" charset="0"/>
                         <a:ea typeface="Calibri" charset="0"/>
                         <a:cs typeface="Calibri" charset="0"/>
@@ -4029,7 +4029,7 @@
                         <a:buNone/>
                       </a:pPr>
                       <a:r>
-                        <a:rPr lang="en-US" sz="1300" b="1" dirty="0">
+                        <a:rPr lang="en-US" sz="1400" b="1" dirty="0">
                           <a:solidFill>
                             <a:srgbClr val="1B1B1F"/>
                           </a:solidFill>
@@ -4039,7 +4039,7 @@
                         </a:rPr>
                         <a:t>7</a:t>
                       </a:r>
-                      <a:endParaRPr lang="en-US" sz="1300" dirty="0">
+                      <a:endParaRPr lang="en-US" sz="1400" dirty="0">
                         <a:latin typeface="Calibri" charset="0"/>
                         <a:ea typeface="Calibri" charset="0"/>
                         <a:cs typeface="Calibri" charset="0"/>
@@ -4097,7 +4097,7 @@
                         <a:buNone/>
                       </a:pPr>
                       <a:r>
-                        <a:rPr lang="en-US" sz="1300" b="1" dirty="0">
+                        <a:rPr lang="en-US" sz="1400" b="1" dirty="0">
                           <a:solidFill>
                             <a:srgbClr val="1B1B1F"/>
                           </a:solidFill>
@@ -4107,7 +4107,7 @@
                         </a:rPr>
                         <a:t>8</a:t>
                       </a:r>
-                      <a:endParaRPr lang="en-US" sz="1300" dirty="0">
+                      <a:endParaRPr lang="en-US" sz="1400" dirty="0">
                         <a:latin typeface="Calibri" charset="0"/>
                         <a:ea typeface="Calibri" charset="0"/>
                         <a:cs typeface="Calibri" charset="0"/>
@@ -4165,7 +4165,7 @@
                         <a:buNone/>
                       </a:pPr>
                       <a:r>
-                        <a:rPr lang="en-US" sz="1300" b="1" dirty="0">
+                        <a:rPr lang="en-US" sz="1400" b="1" dirty="0">
                           <a:solidFill>
                             <a:srgbClr val="1B1B1F"/>
                           </a:solidFill>
@@ -4175,7 +4175,7 @@
                         </a:rPr>
                         <a:t>9</a:t>
                       </a:r>
-                      <a:endParaRPr lang="en-US" sz="1300" dirty="0">
+                      <a:endParaRPr lang="en-US" sz="1400" dirty="0">
                         <a:latin typeface="Calibri" charset="0"/>
                         <a:ea typeface="Calibri" charset="0"/>
                         <a:cs typeface="Calibri" charset="0"/>
@@ -4233,7 +4233,7 @@
                         <a:buNone/>
                       </a:pPr>
                       <a:r>
-                        <a:rPr lang="en-US" sz="1300" b="1" dirty="0">
+                        <a:rPr lang="en-US" sz="1400" b="1" dirty="0">
                           <a:solidFill>
                             <a:srgbClr val="1B1B1F"/>
                           </a:solidFill>
@@ -4243,7 +4243,7 @@
                         </a:rPr>
                         <a:t>10</a:t>
                       </a:r>
-                      <a:endParaRPr lang="en-US" sz="1300" dirty="0">
+                      <a:endParaRPr lang="en-US" sz="1400" dirty="0">
                         <a:latin typeface="Calibri" charset="0"/>
                         <a:ea typeface="Calibri" charset="0"/>
                         <a:cs typeface="Calibri" charset="0"/>
@@ -4301,7 +4301,7 @@
                         <a:buNone/>
                       </a:pPr>
                       <a:r>
-                        <a:rPr lang="en-US" sz="1300" b="1" dirty="0">
+                        <a:rPr lang="en-US" sz="1400" b="1" dirty="0">
                           <a:solidFill>
                             <a:srgbClr val="1B1B1F"/>
                           </a:solidFill>
@@ -4311,7 +4311,7 @@
                         </a:rPr>
                         <a:t>11</a:t>
                       </a:r>
-                      <a:endParaRPr lang="en-US" sz="1300" dirty="0">
+                      <a:endParaRPr lang="en-US" sz="1400" dirty="0">
                         <a:latin typeface="Calibri" charset="0"/>
                         <a:ea typeface="Calibri" charset="0"/>
                         <a:cs typeface="Calibri" charset="0"/>
@@ -4369,7 +4369,7 @@
                         <a:buNone/>
                       </a:pPr>
                       <a:r>
-                        <a:rPr lang="en-US" sz="1300" b="1" dirty="0">
+                        <a:rPr lang="en-US" sz="1400" b="1" dirty="0">
                           <a:solidFill>
                             <a:srgbClr val="1B1B1F"/>
                           </a:solidFill>
@@ -4379,7 +4379,7 @@
                         </a:rPr>
                         <a:t>12</a:t>
                       </a:r>
-                      <a:endParaRPr lang="en-US" sz="1300" dirty="0">
+                      <a:endParaRPr lang="en-US" sz="1400" dirty="0">
                         <a:latin typeface="Calibri" charset="0"/>
                         <a:ea typeface="Calibri" charset="0"/>
                         <a:cs typeface="Calibri" charset="0"/>
@@ -4437,7 +4437,7 @@
                         <a:buNone/>
                       </a:pPr>
                       <a:r>
-                        <a:rPr lang="en-US" sz="1300" b="1" dirty="0">
+                        <a:rPr lang="en-US" sz="1400" b="1" dirty="0">
                           <a:solidFill>
                             <a:srgbClr val="1B1B1F"/>
                           </a:solidFill>
@@ -4447,7 +4447,7 @@
                         </a:rPr>
                         <a:t>13</a:t>
                       </a:r>
-                      <a:endParaRPr lang="en-US" sz="1300" dirty="0">
+                      <a:endParaRPr lang="en-US" sz="1400" dirty="0">
                         <a:latin typeface="Calibri" charset="0"/>
                         <a:ea typeface="Calibri" charset="0"/>
                         <a:cs typeface="Calibri" charset="0"/>
@@ -4505,7 +4505,7 @@
                         <a:buNone/>
                       </a:pPr>
                       <a:r>
-                        <a:rPr lang="en-US" sz="1300" b="1" dirty="0">
+                        <a:rPr lang="en-US" sz="1400" b="1" dirty="0">
                           <a:solidFill>
                             <a:srgbClr val="1B1B1F"/>
                           </a:solidFill>
@@ -4515,7 +4515,7 @@
                         </a:rPr>
                         <a:t>14</a:t>
                       </a:r>
-                      <a:endParaRPr lang="en-US" sz="1300" dirty="0">
+                      <a:endParaRPr lang="en-US" sz="1400" dirty="0">
                         <a:latin typeface="Calibri" charset="0"/>
                         <a:ea typeface="Calibri" charset="0"/>
                         <a:cs typeface="Calibri" charset="0"/>
@@ -4573,7 +4573,7 @@
                         <a:buNone/>
                       </a:pPr>
                       <a:r>
-                        <a:rPr lang="en-US" sz="1300" b="1" dirty="0">
+                        <a:rPr lang="en-US" sz="1400" b="1" dirty="0">
                           <a:solidFill>
                             <a:srgbClr val="1B1B1F"/>
                           </a:solidFill>
@@ -4583,7 +4583,7 @@
                         </a:rPr>
                         <a:t>15</a:t>
                       </a:r>
-                      <a:endParaRPr lang="en-US" sz="1300" dirty="0">
+                      <a:endParaRPr lang="en-US" sz="1400" dirty="0">
                         <a:latin typeface="Calibri" charset="0"/>
                         <a:ea typeface="Calibri" charset="0"/>
                         <a:cs typeface="Calibri" charset="0"/>
@@ -4643,7 +4643,7 @@
                         <a:buNone/>
                       </a:pPr>
                       <a:r>
-                        <a:rPr lang="en-US" sz="1300" dirty="0">
+                        <a:rPr lang="en-US" sz="1400" dirty="0">
                           <a:solidFill>
                             <a:srgbClr val="1B1B1F"/>
                           </a:solidFill>
@@ -4653,7 +4653,7 @@
                         </a:rPr>
                         <a:t>aus</a:t>
                       </a:r>
-                      <a:endParaRPr lang="en-US" sz="1300" dirty="0">
+                      <a:endParaRPr lang="en-US" sz="1400" dirty="0">
                         <a:latin typeface="Calibri" charset="0"/>
                         <a:ea typeface="Calibri" charset="0"/>
                         <a:cs typeface="Calibri" charset="0"/>
@@ -4711,7 +4711,7 @@
                         <a:buNone/>
                       </a:pPr>
                       <a:r>
-                        <a:rPr lang="en-US" sz="1300" dirty="0">
+                        <a:rPr lang="en-US" sz="1400" dirty="0">
                           <a:solidFill>
                             <a:srgbClr val="1B1B1F"/>
                           </a:solidFill>
@@ -4721,7 +4721,7 @@
                         </a:rPr>
                         <a:t>14</a:t>
                       </a:r>
-                      <a:endParaRPr lang="en-US" sz="1300" dirty="0">
+                      <a:endParaRPr lang="en-US" sz="1400" dirty="0">
                         <a:latin typeface="Calibri" charset="0"/>
                         <a:ea typeface="Calibri" charset="0"/>
                         <a:cs typeface="Calibri" charset="0"/>
@@ -4779,7 +4779,7 @@
                         <a:buNone/>
                       </a:pPr>
                       <a:r>
-                        <a:rPr lang="en-US" sz="1300" dirty="0">
+                        <a:rPr lang="en-US" sz="1400" dirty="0">
                           <a:solidFill>
                             <a:srgbClr val="1B1B1F"/>
                           </a:solidFill>
@@ -4789,7 +4789,7 @@
                         </a:rPr>
                         <a:t>4</a:t>
                       </a:r>
-                      <a:endParaRPr lang="en-US" sz="1300" dirty="0">
+                      <a:endParaRPr lang="en-US" sz="1400" dirty="0">
                         <a:latin typeface="Calibri" charset="0"/>
                         <a:ea typeface="Calibri" charset="0"/>
                         <a:cs typeface="Calibri" charset="0"/>
@@ -4847,7 +4847,7 @@
                         <a:buNone/>
                       </a:pPr>
                       <a:r>
-                        <a:rPr lang="en-US" sz="1300" dirty="0">
+                        <a:rPr lang="en-US" sz="1400" dirty="0">
                           <a:solidFill>
                             <a:srgbClr val="1B1B1F"/>
                           </a:solidFill>
@@ -4857,7 +4857,7 @@
                         </a:rPr>
                         <a:t>11</a:t>
                       </a:r>
-                      <a:endParaRPr lang="en-US" sz="1300" dirty="0">
+                      <a:endParaRPr lang="en-US" sz="1400" dirty="0">
                         <a:latin typeface="Calibri" charset="0"/>
                         <a:ea typeface="Calibri" charset="0"/>
                         <a:cs typeface="Calibri" charset="0"/>
@@ -4915,7 +4915,7 @@
                         <a:buNone/>
                       </a:pPr>
                       <a:r>
-                        <a:rPr lang="en-US" sz="1300" dirty="0">
+                        <a:rPr lang="en-US" sz="1400" dirty="0">
                           <a:solidFill>
                             <a:srgbClr val="1B1B1F"/>
                           </a:solidFill>
@@ -4925,7 +4925,7 @@
                         </a:rPr>
                         <a:t>1</a:t>
                       </a:r>
-                      <a:endParaRPr lang="en-US" sz="1300" dirty="0">
+                      <a:endParaRPr lang="en-US" sz="1400" dirty="0">
                         <a:latin typeface="Calibri" charset="0"/>
                         <a:ea typeface="Calibri" charset="0"/>
                         <a:cs typeface="Calibri" charset="0"/>
@@ -4983,7 +4983,7 @@
                         <a:buNone/>
                       </a:pPr>
                       <a:r>
-                        <a:rPr lang="en-US" sz="1300" dirty="0">
+                        <a:rPr lang="en-US" sz="1400" dirty="0">
                           <a:solidFill>
                             <a:srgbClr val="1B1B1F"/>
                           </a:solidFill>
@@ -4993,7 +4993,7 @@
                         </a:rPr>
                         <a:t>7</a:t>
                       </a:r>
-                      <a:endParaRPr lang="en-US" sz="1300" dirty="0">
+                      <a:endParaRPr lang="en-US" sz="1400" dirty="0">
                         <a:latin typeface="Calibri" charset="0"/>
                         <a:ea typeface="Calibri" charset="0"/>
                         <a:cs typeface="Calibri" charset="0"/>
@@ -5051,7 +5051,7 @@
                         <a:buNone/>
                       </a:pPr>
                       <a:r>
-                        <a:rPr lang="en-US" sz="1300" dirty="0">
+                        <a:rPr lang="en-US" sz="1400" dirty="0">
                           <a:solidFill>
                             <a:srgbClr val="1B1B1F"/>
                           </a:solidFill>
@@ -5061,7 +5061,7 @@
                         </a:rPr>
                         <a:t>9</a:t>
                       </a:r>
-                      <a:endParaRPr lang="en-US" sz="1300" dirty="0">
+                      <a:endParaRPr lang="en-US" sz="1400" dirty="0">
                         <a:latin typeface="Calibri" charset="0"/>
                         <a:ea typeface="Calibri" charset="0"/>
                         <a:cs typeface="Calibri" charset="0"/>
@@ -5119,7 +5119,7 @@
                         <a:buNone/>
                       </a:pPr>
                       <a:r>
-                        <a:rPr lang="en-US" sz="1300" dirty="0">
+                        <a:rPr lang="en-US" sz="1400" dirty="0">
                           <a:solidFill>
                             <a:srgbClr val="1B1B1F"/>
                           </a:solidFill>
@@ -5129,7 +5129,7 @@
                         </a:rPr>
                         <a:t>12</a:t>
                       </a:r>
-                      <a:endParaRPr lang="en-US" sz="1300" dirty="0">
+                      <a:endParaRPr lang="en-US" sz="1400" dirty="0">
                         <a:latin typeface="Calibri" charset="0"/>
                         <a:ea typeface="Calibri" charset="0"/>
                         <a:cs typeface="Calibri" charset="0"/>
@@ -5187,7 +5187,7 @@
                         <a:buNone/>
                       </a:pPr>
                       <a:r>
-                        <a:rPr lang="en-US" sz="1300" dirty="0">
+                        <a:rPr lang="en-US" sz="1400" dirty="0">
                           <a:solidFill>
                             <a:srgbClr val="1B1B1F"/>
                           </a:solidFill>
@@ -5197,7 +5197,7 @@
                         </a:rPr>
                         <a:t>10</a:t>
                       </a:r>
-                      <a:endParaRPr lang="en-US" sz="1300" dirty="0">
+                      <a:endParaRPr lang="en-US" sz="1400" dirty="0">
                         <a:latin typeface="Calibri" charset="0"/>
                         <a:ea typeface="Calibri" charset="0"/>
                         <a:cs typeface="Calibri" charset="0"/>
@@ -5255,7 +5255,7 @@
                         <a:buNone/>
                       </a:pPr>
                       <a:r>
-                        <a:rPr lang="en-US" sz="1300" dirty="0">
+                        <a:rPr lang="en-US" sz="1400" dirty="0">
                           <a:solidFill>
                             <a:srgbClr val="1B1B1F"/>
                           </a:solidFill>
@@ -5265,7 +5265,7 @@
                         </a:rPr>
                         <a:t>13</a:t>
                       </a:r>
-                      <a:endParaRPr lang="en-US" sz="1300" dirty="0">
+                      <a:endParaRPr lang="en-US" sz="1400" dirty="0">
                         <a:latin typeface="Calibri" charset="0"/>
                         <a:ea typeface="Calibri" charset="0"/>
                         <a:cs typeface="Calibri" charset="0"/>
@@ -5323,7 +5323,7 @@
                         <a:buNone/>
                       </a:pPr>
                       <a:r>
-                        <a:rPr lang="en-US" sz="1300" dirty="0">
+                        <a:rPr lang="en-US" sz="1400" dirty="0">
                           <a:solidFill>
                             <a:srgbClr val="1B1B1F"/>
                           </a:solidFill>
@@ -5333,7 +5333,7 @@
                         </a:rPr>
                         <a:t>2</a:t>
                       </a:r>
-                      <a:endParaRPr lang="en-US" sz="1300" dirty="0">
+                      <a:endParaRPr lang="en-US" sz="1400" dirty="0">
                         <a:latin typeface="Calibri" charset="0"/>
                         <a:ea typeface="Calibri" charset="0"/>
                         <a:cs typeface="Calibri" charset="0"/>
@@ -5391,7 +5391,7 @@
                         <a:buNone/>
                       </a:pPr>
                       <a:r>
-                        <a:rPr lang="en-US" sz="1300" dirty="0">
+                        <a:rPr lang="en-US" sz="1400" dirty="0">
                           <a:solidFill>
                             <a:srgbClr val="1B1B1F"/>
                           </a:solidFill>
@@ -5401,7 +5401,7 @@
                         </a:rPr>
                         <a:t>0</a:t>
                       </a:r>
-                      <a:endParaRPr lang="en-US" sz="1300" dirty="0">
+                      <a:endParaRPr lang="en-US" sz="1400" dirty="0">
                         <a:latin typeface="Calibri" charset="0"/>
                         <a:ea typeface="Calibri" charset="0"/>
                         <a:cs typeface="Calibri" charset="0"/>
@@ -5459,7 +5459,7 @@
                         <a:buNone/>
                       </a:pPr>
                       <a:r>
-                        <a:rPr lang="en-US" sz="1300" dirty="0">
+                        <a:rPr lang="en-US" sz="1400" dirty="0">
                           <a:solidFill>
                             <a:srgbClr val="1B1B1F"/>
                           </a:solidFill>
@@ -5469,7 +5469,7 @@
                         </a:rPr>
                         <a:t>15</a:t>
                       </a:r>
-                      <a:endParaRPr lang="en-US" sz="1300" dirty="0">
+                      <a:endParaRPr lang="en-US" sz="1400" dirty="0">
                         <a:latin typeface="Calibri" charset="0"/>
                         <a:ea typeface="Calibri" charset="0"/>
                         <a:cs typeface="Calibri" charset="0"/>
@@ -5527,7 +5527,7 @@
                         <a:buNone/>
                       </a:pPr>
                       <a:r>
-                        <a:rPr lang="en-US" sz="1300" dirty="0">
+                        <a:rPr lang="en-US" sz="1400" dirty="0">
                           <a:solidFill>
                             <a:srgbClr val="1B1B1F"/>
                           </a:solidFill>
@@ -5537,7 +5537,7 @@
                         </a:rPr>
                         <a:t>8</a:t>
                       </a:r>
-                      <a:endParaRPr lang="en-US" sz="1300" dirty="0">
+                      <a:endParaRPr lang="en-US" sz="1400" dirty="0">
                         <a:latin typeface="Calibri" charset="0"/>
                         <a:ea typeface="Calibri" charset="0"/>
                         <a:cs typeface="Calibri" charset="0"/>
@@ -5595,7 +5595,7 @@
                         <a:buNone/>
                       </a:pPr>
                       <a:r>
-                        <a:rPr lang="en-US" sz="1300" dirty="0">
+                        <a:rPr lang="en-US" sz="1400" dirty="0">
                           <a:solidFill>
                             <a:srgbClr val="1B1B1F"/>
                           </a:solidFill>
@@ -5605,7 +5605,7 @@
                         </a:rPr>
                         <a:t>5</a:t>
                       </a:r>
-                      <a:endParaRPr lang="en-US" sz="1300" dirty="0">
+                      <a:endParaRPr lang="en-US" sz="1400" dirty="0">
                         <a:latin typeface="Calibri" charset="0"/>
                         <a:ea typeface="Calibri" charset="0"/>
                         <a:cs typeface="Calibri" charset="0"/>
@@ -5663,7 +5663,7 @@
                         <a:buNone/>
                       </a:pPr>
                       <a:r>
-                        <a:rPr lang="en-US" sz="1300" dirty="0">
+                        <a:rPr lang="en-US" sz="1400" dirty="0">
                           <a:solidFill>
                             <a:srgbClr val="1B1B1F"/>
                           </a:solidFill>
@@ -5673,7 +5673,7 @@
                         </a:rPr>
                         <a:t>3</a:t>
                       </a:r>
-                      <a:endParaRPr lang="en-US" sz="1300" dirty="0">
+                      <a:endParaRPr lang="en-US" sz="1400" dirty="0">
                         <a:latin typeface="Calibri" charset="0"/>
                         <a:ea typeface="Calibri" charset="0"/>
                         <a:cs typeface="Calibri" charset="0"/>
@@ -5731,7 +5731,7 @@
                         <a:buNone/>
                       </a:pPr>
                       <a:r>
-                        <a:rPr lang="en-US" sz="1300" dirty="0">
+                        <a:rPr lang="en-US" sz="1400" dirty="0">
                           <a:solidFill>
                             <a:srgbClr val="1B1B1F"/>
                           </a:solidFill>
@@ -5741,7 +5741,7 @@
                         </a:rPr>
                         <a:t>6</a:t>
                       </a:r>
-                      <a:endParaRPr lang="en-US" sz="1300" dirty="0">
+                      <a:endParaRPr lang="en-US" sz="1400" dirty="0">
                         <a:latin typeface="Calibri" charset="0"/>
                         <a:ea typeface="Calibri" charset="0"/>
                         <a:cs typeface="Calibri" charset="0"/>
@@ -5803,7 +5803,7 @@
         </p:nvSpPr>
         <p:spPr>
           <a:xfrm>
-            <a:off x="548640" y="3235960"/>
+            <a:off x="548640" y="3266948"/>
             <a:ext cx="7315200" cy="727456"/>
           </a:xfrm>
           <a:prstGeom prst="rect">
@@ -5847,7 +5847,7 @@
         </p:nvSpPr>
         <p:spPr>
           <a:xfrm>
-            <a:off x="548640" y="4091432"/>
+            <a:off x="548640" y="4122420"/>
             <a:ext cx="7315200" cy="386588"/>
           </a:xfrm>
           <a:prstGeom prst="rect">
@@ -6039,7 +6039,7 @@
                         <a:buNone/>
                       </a:pPr>
                       <a:r>
-                        <a:rPr lang="en-US" sz="1600" b="1" dirty="0">
+                        <a:rPr lang="en-US" sz="1700" b="1" dirty="0">
                           <a:solidFill>
                             <a:srgbClr val="1B1B1F"/>
                           </a:solidFill>
@@ -6049,7 +6049,7 @@
                         </a:rPr>
                         <a:t>Schritt</a:t>
                       </a:r>
-                      <a:endParaRPr lang="en-US" sz="1600" dirty="0">
+                      <a:endParaRPr lang="en-US" sz="1700" dirty="0">
                         <a:latin typeface="Calibri" charset="0"/>
                         <a:ea typeface="Calibri" charset="0"/>
                         <a:cs typeface="Calibri" charset="0"/>
@@ -6107,7 +6107,7 @@
                         <a:buNone/>
                       </a:pPr>
                       <a:r>
-                        <a:rPr lang="en-US" sz="1600" b="1" dirty="0">
+                        <a:rPr lang="en-US" sz="1700" b="1" dirty="0">
                           <a:solidFill>
                             <a:srgbClr val="1B1B1F"/>
                           </a:solidFill>
@@ -6117,7 +6117,7 @@
                         </a:rPr>
                         <a:t>Bits</a:t>
                       </a:r>
-                      <a:endParaRPr lang="en-US" sz="1600" dirty="0">
+                      <a:endParaRPr lang="en-US" sz="1700" dirty="0">
                         <a:latin typeface="Calibri" charset="0"/>
                         <a:ea typeface="Calibri" charset="0"/>
                         <a:cs typeface="Calibri" charset="0"/>
@@ -6175,7 +6175,7 @@
                         <a:buNone/>
                       </a:pPr>
                       <a:r>
-                        <a:rPr lang="en-US" sz="1600" b="1" dirty="0">
+                        <a:rPr lang="en-US" sz="1700" b="1" dirty="0">
                           <a:solidFill>
                             <a:srgbClr val="1B1B1F"/>
                           </a:solidFill>
@@ -6185,7 +6185,7 @@
                         </a:rPr>
                         <a:t>Notiz</a:t>
                       </a:r>
-                      <a:endParaRPr lang="en-US" sz="1600" dirty="0">
+                      <a:endParaRPr lang="en-US" sz="1700" dirty="0">
                         <a:latin typeface="Calibri" charset="0"/>
                         <a:ea typeface="Calibri" charset="0"/>
                         <a:cs typeface="Calibri" charset="0"/>
@@ -6245,7 +6245,7 @@
                         <a:buNone/>
                       </a:pPr>
                       <a:r>
-                        <a:rPr lang="en-US" sz="1600" dirty="0">
+                        <a:rPr lang="en-US" sz="1700" dirty="0">
                           <a:solidFill>
                             <a:srgbClr val="1B1B1F"/>
                           </a:solidFill>
@@ -6255,7 +6255,7 @@
                         </a:rPr>
                         <a:t>Klartext W</a:t>
                       </a:r>
-                      <a:endParaRPr lang="en-US" sz="1600" dirty="0">
+                      <a:endParaRPr lang="en-US" sz="1700" dirty="0">
                         <a:latin typeface="Calibri" charset="0"/>
                         <a:ea typeface="Calibri" charset="0"/>
                         <a:cs typeface="Calibri" charset="0"/>
@@ -6313,7 +6313,7 @@
                         <a:buNone/>
                       </a:pPr>
                       <a:r>
-                        <a:rPr lang="en-US" sz="1600" dirty="0">
+                        <a:rPr lang="en-US" sz="1700" dirty="0">
                           <a:solidFill>
                             <a:srgbClr val="1B1B1F"/>
                           </a:solidFill>
@@ -6323,7 +6323,7 @@
                         </a:rPr>
                         <a:t>0101 0111</a:t>
                       </a:r>
-                      <a:endParaRPr lang="en-US" sz="1600" dirty="0">
+                      <a:endParaRPr lang="en-US" sz="1700" dirty="0">
                         <a:latin typeface="Calibri" charset="0"/>
                         <a:ea typeface="Calibri" charset="0"/>
                         <a:cs typeface="Calibri" charset="0"/>
@@ -6381,7 +6381,7 @@
                         <a:buNone/>
                       </a:pPr>
                       <a:r>
-                        <a:rPr lang="en-US" sz="1600" dirty="0">
+                        <a:rPr lang="en-US" sz="1700" dirty="0">
                           <a:solidFill>
                             <a:srgbClr val="1B1B1F"/>
                           </a:solidFill>
@@ -6391,7 +6391,7 @@
                         </a:rPr>
                         <a:t>ASCII 87</a:t>
                       </a:r>
-                      <a:endParaRPr lang="en-US" sz="1600" dirty="0">
+                      <a:endParaRPr lang="en-US" sz="1700" dirty="0">
                         <a:latin typeface="Calibri" charset="0"/>
                         <a:ea typeface="Calibri" charset="0"/>
                         <a:cs typeface="Calibri" charset="0"/>
@@ -6451,7 +6451,7 @@
                         <a:buNone/>
                       </a:pPr>
                       <a:r>
-                        <a:rPr lang="en-US" sz="1600" dirty="0">
+                        <a:rPr lang="en-US" sz="1700" dirty="0">
                           <a:solidFill>
                             <a:srgbClr val="1B1B1F"/>
                           </a:solidFill>
@@ -6461,7 +6461,7 @@
                         </a:rPr>
                         <a:t>⊕ K1</a:t>
                       </a:r>
-                      <a:endParaRPr lang="en-US" sz="1600" dirty="0">
+                      <a:endParaRPr lang="en-US" sz="1700" dirty="0">
                         <a:latin typeface="Calibri" charset="0"/>
                         <a:ea typeface="Calibri" charset="0"/>
                         <a:cs typeface="Calibri" charset="0"/>
@@ -6519,7 +6519,7 @@
                         <a:buNone/>
                       </a:pPr>
                       <a:r>
-                        <a:rPr lang="en-US" sz="1600" dirty="0">
+                        <a:rPr lang="en-US" sz="1700" dirty="0">
                           <a:solidFill>
                             <a:srgbClr val="1B1B1F"/>
                           </a:solidFill>
@@ -6529,7 +6529,7 @@
                         </a:rPr>
                         <a:t>0010 1011</a:t>
                       </a:r>
-                      <a:endParaRPr lang="en-US" sz="1600" dirty="0">
+                      <a:endParaRPr lang="en-US" sz="1700" dirty="0">
                         <a:latin typeface="Calibri" charset="0"/>
                         <a:ea typeface="Calibri" charset="0"/>
                         <a:cs typeface="Calibri" charset="0"/>
@@ -6639,7 +6639,7 @@
                         <a:buNone/>
                       </a:pPr>
                       <a:r>
-                        <a:rPr lang="en-US" sz="1600" dirty="0">
+                        <a:rPr lang="en-US" sz="1700" dirty="0">
                           <a:solidFill>
                             <a:srgbClr val="1B1B1F"/>
                           </a:solidFill>
@@ -6649,7 +6649,7 @@
                         </a:rPr>
                         <a:t>=</a:t>
                       </a:r>
-                      <a:endParaRPr lang="en-US" sz="1600" dirty="0">
+                      <a:endParaRPr lang="en-US" sz="1700" dirty="0">
                         <a:latin typeface="Calibri" charset="0"/>
                         <a:ea typeface="Calibri" charset="0"/>
                         <a:cs typeface="Calibri" charset="0"/>
@@ -6707,7 +6707,7 @@
                         <a:buNone/>
                       </a:pPr>
                       <a:r>
-                        <a:rPr lang="en-US" sz="1600" dirty="0">
+                        <a:rPr lang="en-US" sz="1700" dirty="0">
                           <a:solidFill>
                             <a:srgbClr val="1B1B1F"/>
                           </a:solidFill>
@@ -6717,7 +6717,7 @@
                         </a:rPr>
                         <a:t>0111 1100</a:t>
                       </a:r>
-                      <a:endParaRPr lang="en-US" sz="1600" dirty="0">
+                      <a:endParaRPr lang="en-US" sz="1700" dirty="0">
                         <a:latin typeface="Calibri" charset="0"/>
                         <a:ea typeface="Calibri" charset="0"/>
                         <a:cs typeface="Calibri" charset="0"/>
@@ -6775,7 +6775,7 @@
                         <a:buNone/>
                       </a:pPr>
                       <a:r>
-                        <a:rPr lang="en-US" sz="1600" dirty="0">
+                        <a:rPr lang="en-US" sz="1700" dirty="0">
                           <a:solidFill>
                             <a:srgbClr val="1B1B1F"/>
                           </a:solidFill>
@@ -6785,7 +6785,7 @@
                         </a:rPr>
                         <a:t>7 | 12</a:t>
                       </a:r>
-                      <a:endParaRPr lang="en-US" sz="1600" dirty="0">
+                      <a:endParaRPr lang="en-US" sz="1700" dirty="0">
                         <a:latin typeface="Calibri" charset="0"/>
                         <a:ea typeface="Calibri" charset="0"/>
                         <a:cs typeface="Calibri" charset="0"/>
@@ -6845,7 +6845,7 @@
                         <a:buNone/>
                       </a:pPr>
                       <a:r>
-                        <a:rPr lang="en-US" sz="1600" dirty="0">
+                        <a:rPr lang="en-US" sz="1700" dirty="0">
                           <a:solidFill>
                             <a:srgbClr val="1B1B1F"/>
                           </a:solidFill>
@@ -6855,7 +6855,7 @@
                         </a:rPr>
                         <a:t>S-Box</a:t>
                       </a:r>
-                      <a:endParaRPr lang="en-US" sz="1600" dirty="0">
+                      <a:endParaRPr lang="en-US" sz="1700" dirty="0">
                         <a:latin typeface="Calibri" charset="0"/>
                         <a:ea typeface="Calibri" charset="0"/>
                         <a:cs typeface="Calibri" charset="0"/>
@@ -6913,7 +6913,7 @@
                         <a:buNone/>
                       </a:pPr>
                       <a:r>
-                        <a:rPr lang="en-US" sz="1600" dirty="0">
+                        <a:rPr lang="en-US" sz="1700" dirty="0">
                           <a:solidFill>
                             <a:srgbClr val="1B1B1F"/>
                           </a:solidFill>
@@ -6923,7 +6923,7 @@
                         </a:rPr>
                         <a:t>1010 1000</a:t>
                       </a:r>
-                      <a:endParaRPr lang="en-US" sz="1600" dirty="0">
+                      <a:endParaRPr lang="en-US" sz="1700" dirty="0">
                         <a:latin typeface="Calibri" charset="0"/>
                         <a:ea typeface="Calibri" charset="0"/>
                         <a:cs typeface="Calibri" charset="0"/>
@@ -6981,7 +6981,7 @@
                         <a:buNone/>
                       </a:pPr>
                       <a:r>
-                        <a:rPr lang="en-US" sz="1600" dirty="0">
+                        <a:rPr lang="en-US" sz="1700" dirty="0">
                           <a:solidFill>
                             <a:srgbClr val="1B1B1F"/>
                           </a:solidFill>
@@ -6991,7 +6991,7 @@
                         </a:rPr>
                         <a:t>10 | 8</a:t>
                       </a:r>
-                      <a:endParaRPr lang="en-US" sz="1600" dirty="0">
+                      <a:endParaRPr lang="en-US" sz="1700" dirty="0">
                         <a:latin typeface="Calibri" charset="0"/>
                         <a:ea typeface="Calibri" charset="0"/>
                         <a:cs typeface="Calibri" charset="0"/>
@@ -7051,7 +7051,7 @@
                         <a:buNone/>
                       </a:pPr>
                       <a:r>
-                        <a:rPr lang="en-US" sz="1600" dirty="0">
+                        <a:rPr lang="en-US" sz="1700" dirty="0">
                           <a:solidFill>
                             <a:srgbClr val="1B1B1F"/>
                           </a:solidFill>
@@ -7061,7 +7061,7 @@
                         </a:rPr>
                         <a:t>Permutation</a:t>
                       </a:r>
-                      <a:endParaRPr lang="en-US" sz="1600" dirty="0">
+                      <a:endParaRPr lang="en-US" sz="1700" dirty="0">
                         <a:latin typeface="Calibri" charset="0"/>
                         <a:ea typeface="Calibri" charset="0"/>
                         <a:cs typeface="Calibri" charset="0"/>
@@ -7106,7 +7106,7 @@
                       <a:tailEnd type="none" w="med" len="med"/>
                     </a:lnB>
                     <a:solidFill>
-                      <a:srgbClr val="FFFFFF"/>
+                      <a:srgbClr val="F3E1C3"/>
                     </a:solidFill>
                   </a:tcPr>
                 </a:tc>
@@ -7119,7 +7119,7 @@
                         <a:buNone/>
                       </a:pPr>
                       <a:r>
-                        <a:rPr lang="en-US" sz="1600" dirty="0">
+                        <a:rPr lang="en-US" sz="1700" dirty="0">
                           <a:solidFill>
                             <a:srgbClr val="1B1B1F"/>
                           </a:solidFill>
@@ -7129,7 +7129,7 @@
                         </a:rPr>
                         <a:t>1100 0100</a:t>
                       </a:r>
-                      <a:endParaRPr lang="en-US" sz="1600" dirty="0">
+                      <a:endParaRPr lang="en-US" sz="1700" dirty="0">
                         <a:latin typeface="Calibri" charset="0"/>
                         <a:ea typeface="Calibri" charset="0"/>
                         <a:cs typeface="Calibri" charset="0"/>
@@ -7174,7 +7174,7 @@
                       <a:tailEnd type="none" w="med" len="med"/>
                     </a:lnB>
                     <a:solidFill>
-                      <a:srgbClr val="FFFFFF"/>
+                      <a:srgbClr val="F3E1C3"/>
                     </a:solidFill>
                   </a:tcPr>
                 </a:tc>
@@ -7187,7 +7187,7 @@
                         <a:buNone/>
                       </a:pPr>
                       <a:r>
-                        <a:rPr lang="en-US" sz="1600" dirty="0">
+                        <a:rPr lang="en-US" sz="1700" dirty="0">
                           <a:solidFill>
                             <a:srgbClr val="1B1B1F"/>
                           </a:solidFill>
@@ -7197,7 +7197,7 @@
                         </a:rPr>
                         <a:t>Ende Runde 1</a:t>
                       </a:r>
-                      <a:endParaRPr lang="en-US" sz="1600" dirty="0">
+                      <a:endParaRPr lang="en-US" sz="1700" dirty="0">
                         <a:latin typeface="Calibri" charset="0"/>
                         <a:ea typeface="Calibri" charset="0"/>
                         <a:cs typeface="Calibri" charset="0"/>
@@ -7242,7 +7242,7 @@
                       <a:tailEnd type="none" w="med" len="med"/>
                     </a:lnB>
                     <a:solidFill>
-                      <a:srgbClr val="FFFFFF"/>
+                      <a:srgbClr val="F3E1C3"/>
                     </a:solidFill>
                   </a:tcPr>
                 </a:tc>
@@ -7257,7 +7257,7 @@
                         <a:buNone/>
                       </a:pPr>
                       <a:r>
-                        <a:rPr lang="en-US" sz="1600" dirty="0">
+                        <a:rPr lang="en-US" sz="1700" dirty="0">
                           <a:solidFill>
                             <a:srgbClr val="1B1B1F"/>
                           </a:solidFill>
@@ -7267,7 +7267,7 @@
                         </a:rPr>
                         <a:t>Runde 2 (⊕ K2, S-Box, P)</a:t>
                       </a:r>
-                      <a:endParaRPr lang="en-US" sz="1600" dirty="0">
+                      <a:endParaRPr lang="en-US" sz="1700" dirty="0">
                         <a:latin typeface="Calibri" charset="0"/>
                         <a:ea typeface="Calibri" charset="0"/>
                         <a:cs typeface="Calibri" charset="0"/>
@@ -7312,7 +7312,7 @@
                       <a:tailEnd type="none" w="med" len="med"/>
                     </a:lnB>
                     <a:solidFill>
-                      <a:srgbClr val="FFFFFF"/>
+                      <a:srgbClr val="F3E1C3"/>
                     </a:solidFill>
                   </a:tcPr>
                 </a:tc>
@@ -7325,7 +7325,7 @@
                         <a:buNone/>
                       </a:pPr>
                       <a:r>
-                        <a:rPr lang="en-US" sz="1600" dirty="0">
+                        <a:rPr lang="en-US" sz="1700" dirty="0">
                           <a:solidFill>
                             <a:srgbClr val="1B1B1F"/>
                           </a:solidFill>
@@ -7335,7 +7335,7 @@
                         </a:rPr>
                         <a:t>1101 1110</a:t>
                       </a:r>
-                      <a:endParaRPr lang="en-US" sz="1600" dirty="0">
+                      <a:endParaRPr lang="en-US" sz="1700" dirty="0">
                         <a:latin typeface="Calibri" charset="0"/>
                         <a:ea typeface="Calibri" charset="0"/>
                         <a:cs typeface="Calibri" charset="0"/>
@@ -7380,7 +7380,7 @@
                       <a:tailEnd type="none" w="med" len="med"/>
                     </a:lnB>
                     <a:solidFill>
-                      <a:srgbClr val="FFFFFF"/>
+                      <a:srgbClr val="F3E1C3"/>
                     </a:solidFill>
                   </a:tcPr>
                 </a:tc>
@@ -7393,7 +7393,7 @@
                         <a:buNone/>
                       </a:pPr>
                       <a:r>
-                        <a:rPr lang="en-US" sz="1600" dirty="0">
+                        <a:rPr lang="en-US" sz="1700" dirty="0">
                           <a:solidFill>
                             <a:srgbClr val="1B1B1F"/>
                           </a:solidFill>
@@ -7403,7 +7403,7 @@
                         </a:rPr>
                         <a:t>Geheimtext</a:t>
                       </a:r>
-                      <a:endParaRPr lang="en-US" sz="1600" dirty="0">
+                      <a:endParaRPr lang="en-US" sz="1700" dirty="0">
                         <a:latin typeface="Calibri" charset="0"/>
                         <a:ea typeface="Calibri" charset="0"/>
                         <a:cs typeface="Calibri" charset="0"/>
@@ -7448,7 +7448,7 @@
                       <a:tailEnd type="none" w="med" len="med"/>
                     </a:lnB>
                     <a:solidFill>
-                      <a:srgbClr val="FFFFFF"/>
+                      <a:srgbClr val="F3E1C3"/>
                     </a:solidFill>
                   </a:tcPr>
                 </a:tc>
@@ -7827,7 +7827,7 @@
                         <a:buNone/>
                       </a:pPr>
                       <a:r>
-                        <a:rPr lang="en-US" sz="1600" b="1" dirty="0">
+                        <a:rPr lang="en-US" sz="1800" b="1" dirty="0">
                           <a:solidFill>
                             <a:srgbClr val="1B1B1F"/>
                           </a:solidFill>
@@ -7837,7 +7837,7 @@
                         </a:rPr>
                         <a:t>W</a:t>
                       </a:r>
-                      <a:endParaRPr lang="en-US" sz="1600" dirty="0">
+                      <a:endParaRPr lang="en-US" sz="1800" dirty="0">
                         <a:latin typeface="Calibri" charset="0"/>
                         <a:ea typeface="Calibri" charset="0"/>
                         <a:cs typeface="Calibri" charset="0"/>
@@ -7895,7 +7895,7 @@
                         <a:buNone/>
                       </a:pPr>
                       <a:r>
-                        <a:rPr lang="en-US" sz="1600" b="1" dirty="0">
+                        <a:rPr lang="en-US" sz="1800" b="1" dirty="0">
                           <a:solidFill>
                             <a:srgbClr val="1B1B1F"/>
                           </a:solidFill>
@@ -7905,7 +7905,7 @@
                         </a:rPr>
                         <a:t>V</a:t>
                       </a:r>
-                      <a:endParaRPr lang="en-US" sz="1600" dirty="0">
+                      <a:endParaRPr lang="en-US" sz="1800" dirty="0">
                         <a:latin typeface="Calibri" charset="0"/>
                         <a:ea typeface="Calibri" charset="0"/>
                         <a:cs typeface="Calibri" charset="0"/>
@@ -7963,7 +7963,7 @@
                         <a:buNone/>
                       </a:pPr>
                       <a:r>
-                        <a:rPr lang="en-US" sz="1600" b="1" dirty="0">
+                        <a:rPr lang="en-US" sz="1800" b="1" dirty="0">
                           <a:solidFill>
                             <a:srgbClr val="1B1B1F"/>
                           </a:solidFill>
@@ -7973,7 +7973,7 @@
                         </a:rPr>
                         <a:t>verschiedene Bits</a:t>
                       </a:r>
-                      <a:endParaRPr lang="en-US" sz="1600" dirty="0">
+                      <a:endParaRPr lang="en-US" sz="1800" dirty="0">
                         <a:latin typeface="Calibri" charset="0"/>
                         <a:ea typeface="Calibri" charset="0"/>
                         <a:cs typeface="Calibri" charset="0"/>
@@ -8033,7 +8033,7 @@
                         <a:buNone/>
                       </a:pPr>
                       <a:r>
-                        <a:rPr lang="en-US" sz="1600" dirty="0">
+                        <a:rPr lang="en-US" sz="1800" dirty="0">
                           <a:solidFill>
                             <a:srgbClr val="1B1B1F"/>
                           </a:solidFill>
@@ -8043,7 +8043,7 @@
                         </a:rPr>
                         <a:t>Klartext</a:t>
                       </a:r>
-                      <a:endParaRPr lang="en-US" sz="1600" dirty="0">
+                      <a:endParaRPr lang="en-US" sz="1800" dirty="0">
                         <a:latin typeface="Calibri" charset="0"/>
                         <a:ea typeface="Calibri" charset="0"/>
                         <a:cs typeface="Calibri" charset="0"/>
@@ -8101,7 +8101,7 @@
                         <a:buNone/>
                       </a:pPr>
                       <a:r>
-                        <a:rPr lang="en-US" sz="1600" dirty="0">
+                        <a:rPr lang="en-US" sz="1800" dirty="0">
                           <a:solidFill>
                             <a:srgbClr val="1B1B1F"/>
                           </a:solidFill>
@@ -8111,7 +8111,7 @@
                         </a:rPr>
                         <a:t>0101 0111</a:t>
                       </a:r>
-                      <a:endParaRPr lang="en-US" sz="1600" dirty="0">
+                      <a:endParaRPr lang="en-US" sz="1800" dirty="0">
                         <a:latin typeface="Calibri" charset="0"/>
                         <a:ea typeface="Calibri" charset="0"/>
                         <a:cs typeface="Calibri" charset="0"/>
@@ -8169,7 +8169,7 @@
                         <a:buNone/>
                       </a:pPr>
                       <a:r>
-                        <a:rPr lang="en-US" sz="1600" dirty="0">
+                        <a:rPr lang="en-US" sz="1800" dirty="0">
                           <a:solidFill>
                             <a:srgbClr val="1B1B1F"/>
                           </a:solidFill>
@@ -8179,7 +8179,7 @@
                         </a:rPr>
                         <a:t>0101 0110</a:t>
                       </a:r>
-                      <a:endParaRPr lang="en-US" sz="1600" dirty="0">
+                      <a:endParaRPr lang="en-US" sz="1800" dirty="0">
                         <a:latin typeface="Calibri" charset="0"/>
                         <a:ea typeface="Calibri" charset="0"/>
                         <a:cs typeface="Calibri" charset="0"/>
@@ -8237,7 +8237,7 @@
                         <a:buNone/>
                       </a:pPr>
                       <a:r>
-                        <a:rPr lang="en-US" sz="1600" dirty="0">
+                        <a:rPr lang="en-US" sz="1800" dirty="0">
                           <a:solidFill>
                             <a:srgbClr val="1B1B1F"/>
                           </a:solidFill>
@@ -8247,7 +8247,7 @@
                         </a:rPr>
                         <a:t>1</a:t>
                       </a:r>
-                      <a:endParaRPr lang="en-US" sz="1600" dirty="0">
+                      <a:endParaRPr lang="en-US" sz="1800" dirty="0">
                         <a:latin typeface="Calibri" charset="0"/>
                         <a:ea typeface="Calibri" charset="0"/>
                         <a:cs typeface="Calibri" charset="0"/>
@@ -8307,7 +8307,7 @@
                         <a:buNone/>
                       </a:pPr>
                       <a:r>
-                        <a:rPr lang="en-US" sz="1600" dirty="0">
+                        <a:rPr lang="en-US" sz="1800" dirty="0">
                           <a:solidFill>
                             <a:srgbClr val="1B1B1F"/>
                           </a:solidFill>
@@ -8317,7 +8317,7 @@
                         </a:rPr>
                         <a:t>nach Runde 1</a:t>
                       </a:r>
-                      <a:endParaRPr lang="en-US" sz="1600" dirty="0">
+                      <a:endParaRPr lang="en-US" sz="1800" dirty="0">
                         <a:latin typeface="Calibri" charset="0"/>
                         <a:ea typeface="Calibri" charset="0"/>
                         <a:cs typeface="Calibri" charset="0"/>
@@ -8375,7 +8375,7 @@
                         <a:buNone/>
                       </a:pPr>
                       <a:r>
-                        <a:rPr lang="en-US" sz="1600" dirty="0">
+                        <a:rPr lang="en-US" sz="1800" dirty="0">
                           <a:solidFill>
                             <a:srgbClr val="1B1B1F"/>
                           </a:solidFill>
@@ -8385,7 +8385,7 @@
                         </a:rPr>
                         <a:t>1100 0100</a:t>
                       </a:r>
-                      <a:endParaRPr lang="en-US" sz="1600" dirty="0">
+                      <a:endParaRPr lang="en-US" sz="1800" dirty="0">
                         <a:latin typeface="Calibri" charset="0"/>
                         <a:ea typeface="Calibri" charset="0"/>
                         <a:cs typeface="Calibri" charset="0"/>
@@ -8443,7 +8443,7 @@
                         <a:buNone/>
                       </a:pPr>
                       <a:r>
-                        <a:rPr lang="en-US" sz="1600" dirty="0">
+                        <a:rPr lang="en-US" sz="1800" dirty="0">
                           <a:solidFill>
                             <a:srgbClr val="1B1B1F"/>
                           </a:solidFill>
@@ -8453,7 +8453,7 @@
                         </a:rPr>
                         <a:t>0110 0110</a:t>
                       </a:r>
-                      <a:endParaRPr lang="en-US" sz="1600" dirty="0">
+                      <a:endParaRPr lang="en-US" sz="1800" dirty="0">
                         <a:latin typeface="Calibri" charset="0"/>
                         <a:ea typeface="Calibri" charset="0"/>
                         <a:cs typeface="Calibri" charset="0"/>
@@ -8511,7 +8511,7 @@
                         <a:buNone/>
                       </a:pPr>
                       <a:r>
-                        <a:rPr lang="en-US" sz="1600" dirty="0">
+                        <a:rPr lang="en-US" sz="1800" dirty="0">
                           <a:solidFill>
                             <a:srgbClr val="1B1B1F"/>
                           </a:solidFill>
@@ -8521,7 +8521,7 @@
                         </a:rPr>
                         <a:t>3</a:t>
                       </a:r>
-                      <a:endParaRPr lang="en-US" sz="1600" dirty="0">
+                      <a:endParaRPr lang="en-US" sz="1800" dirty="0">
                         <a:latin typeface="Calibri" charset="0"/>
                         <a:ea typeface="Calibri" charset="0"/>
                         <a:cs typeface="Calibri" charset="0"/>
@@ -8581,7 +8581,7 @@
                         <a:buNone/>
                       </a:pPr>
                       <a:r>
-                        <a:rPr lang="en-US" sz="1600" dirty="0">
+                        <a:rPr lang="en-US" sz="1800" dirty="0">
                           <a:solidFill>
                             <a:srgbClr val="1B1B1F"/>
                           </a:solidFill>
@@ -8591,7 +8591,7 @@
                         </a:rPr>
                         <a:t>nach Runde 2</a:t>
                       </a:r>
-                      <a:endParaRPr lang="en-US" sz="1600" dirty="0">
+                      <a:endParaRPr lang="en-US" sz="1800" dirty="0">
                         <a:latin typeface="Calibri" charset="0"/>
                         <a:ea typeface="Calibri" charset="0"/>
                         <a:cs typeface="Calibri" charset="0"/>
@@ -8636,7 +8636,7 @@
                       <a:tailEnd type="none" w="med" len="med"/>
                     </a:lnB>
                     <a:solidFill>
-                      <a:srgbClr val="FFFFFF"/>
+                      <a:srgbClr val="F3E1C3"/>
                     </a:solidFill>
                   </a:tcPr>
                 </a:tc>
@@ -8649,7 +8649,7 @@
                         <a:buNone/>
                       </a:pPr>
                       <a:r>
-                        <a:rPr lang="en-US" sz="1600" dirty="0">
+                        <a:rPr lang="en-US" sz="1800" dirty="0">
                           <a:solidFill>
                             <a:srgbClr val="1B1B1F"/>
                           </a:solidFill>
@@ -8659,7 +8659,7 @@
                         </a:rPr>
                         <a:t>1101 1110</a:t>
                       </a:r>
-                      <a:endParaRPr lang="en-US" sz="1600" dirty="0">
+                      <a:endParaRPr lang="en-US" sz="1800" dirty="0">
                         <a:latin typeface="Calibri" charset="0"/>
                         <a:ea typeface="Calibri" charset="0"/>
                         <a:cs typeface="Calibri" charset="0"/>
@@ -8704,7 +8704,7 @@
                       <a:tailEnd type="none" w="med" len="med"/>
                     </a:lnB>
                     <a:solidFill>
-                      <a:srgbClr val="FFFFFF"/>
+                      <a:srgbClr val="F3E1C3"/>
                     </a:solidFill>
                   </a:tcPr>
                 </a:tc>
@@ -8717,7 +8717,7 @@
                         <a:buNone/>
                       </a:pPr>
                       <a:r>
-                        <a:rPr lang="en-US" sz="1600" dirty="0">
+                        <a:rPr lang="en-US" sz="1800" dirty="0">
                           <a:solidFill>
                             <a:srgbClr val="1B1B1F"/>
                           </a:solidFill>
@@ -8727,7 +8727,7 @@
                         </a:rPr>
                         <a:t>1010 1000</a:t>
                       </a:r>
-                      <a:endParaRPr lang="en-US" sz="1600" dirty="0">
+                      <a:endParaRPr lang="en-US" sz="1800" dirty="0">
                         <a:latin typeface="Calibri" charset="0"/>
                         <a:ea typeface="Calibri" charset="0"/>
                         <a:cs typeface="Calibri" charset="0"/>
@@ -8772,7 +8772,7 @@
                       <a:tailEnd type="none" w="med" len="med"/>
                     </a:lnB>
                     <a:solidFill>
-                      <a:srgbClr val="FFFFFF"/>
+                      <a:srgbClr val="F3E1C3"/>
                     </a:solidFill>
                   </a:tcPr>
                 </a:tc>
@@ -8785,7 +8785,7 @@
                         <a:buNone/>
                       </a:pPr>
                       <a:r>
-                        <a:rPr lang="en-US" sz="1600" dirty="0">
+                        <a:rPr lang="en-US" sz="1800" dirty="0">
                           <a:solidFill>
                             <a:srgbClr val="1B1B1F"/>
                           </a:solidFill>
@@ -8795,7 +8795,7 @@
                         </a:rPr>
                         <a:t>5</a:t>
                       </a:r>
-                      <a:endParaRPr lang="en-US" sz="1600" dirty="0">
+                      <a:endParaRPr lang="en-US" sz="1800" dirty="0">
                         <a:latin typeface="Calibri" charset="0"/>
                         <a:ea typeface="Calibri" charset="0"/>
                         <a:cs typeface="Calibri" charset="0"/>
@@ -8840,7 +8840,7 @@
                       <a:tailEnd type="none" w="med" len="med"/>
                     </a:lnB>
                     <a:solidFill>
-                      <a:srgbClr val="FFFFFF"/>
+                      <a:srgbClr val="F3E1C3"/>
                     </a:solidFill>
                   </a:tcPr>
                 </a:tc>
@@ -10188,7 +10188,7 @@
                       <a:tailEnd type="none" w="med" len="med"/>
                     </a:lnB>
                     <a:solidFill>
-                      <a:srgbClr val="FFFFFF"/>
+                      <a:srgbClr val="F3E1C3"/>
                     </a:solidFill>
                   </a:tcPr>
                 </a:tc>
@@ -10256,7 +10256,7 @@
                       <a:tailEnd type="none" w="med" len="med"/>
                     </a:lnB>
                     <a:solidFill>
-                      <a:srgbClr val="FFFFFF"/>
+                      <a:srgbClr val="F3E1C3"/>
                     </a:solidFill>
                   </a:tcPr>
                 </a:tc>
@@ -10324,7 +10324,7 @@
                       <a:tailEnd type="none" w="med" len="med"/>
                     </a:lnB>
                     <a:solidFill>
-                      <a:srgbClr val="FFFFFF"/>
+                      <a:srgbClr val="F3E1C3"/>
                     </a:solidFill>
                   </a:tcPr>
                 </a:tc>
@@ -10392,7 +10392,7 @@
                       <a:tailEnd type="none" w="med" len="med"/>
                     </a:lnB>
                     <a:solidFill>
-                      <a:srgbClr val="FFFFFF"/>
+                      <a:srgbClr val="F3E1C3"/>
                     </a:solidFill>
                   </a:tcPr>
                 </a:tc>
@@ -11412,11 +11412,11 @@
         <p:spPr>
           <a:xfrm>
             <a:off x="1097280" y="1508760"/>
-            <a:ext cx="9997135" cy="4349496"/>
+            <a:ext cx="6217920" cy="4663440"/>
           </a:xfrm>
           <a:prstGeom prst="roundRect">
             <a:avLst>
-              <a:gd name="adj" fmla="val 2102"/>
+              <a:gd name="adj" fmla="val 1961"/>
             </a:avLst>
           </a:prstGeom>
           <a:solidFill>
@@ -11478,7 +11478,7 @@
         <p:spPr>
           <a:xfrm>
             <a:off x="1508760" y="2240280"/>
-            <a:ext cx="9174175" cy="727456"/>
+            <a:ext cx="5394960" cy="603504"/>
           </a:xfrm>
           <a:prstGeom prst="rect">
             <a:avLst/>
@@ -11494,14 +11494,14 @@
               <a:buNone/>
             </a:pPr>
             <a:r>
-              <a:rPr lang="en-US" sz="2200" dirty="0">
+              <a:rPr lang="en-US" sz="1800" dirty="0">
                 <a:solidFill>
                   <a:srgbClr val="1B1B1F"/>
                 </a:solidFill>
               </a:rPr>
               <a:t>XOR: gleich → 0, verschieden → 1; derselbe Schlüssel ver- und entschlüsselt</a:t>
             </a:r>
-            <a:endParaRPr lang="en-US" sz="2200" dirty="0"/>
+            <a:endParaRPr lang="en-US" sz="1800" dirty="0"/>
           </a:p>
         </p:txBody>
       </p:sp>
@@ -11513,8 +11513,8 @@
         </p:nvSpPr>
         <p:spPr>
           <a:xfrm>
-            <a:off x="1508760" y="3095752"/>
-            <a:ext cx="9174175" cy="727456"/>
+            <a:off x="1508760" y="2971800"/>
+            <a:ext cx="5394960" cy="882396"/>
           </a:xfrm>
           <a:prstGeom prst="rect">
             <a:avLst/>
@@ -11530,7 +11530,7 @@
               <a:buNone/>
             </a:pPr>
             <a:r>
-              <a:rPr lang="en-US" sz="2200" dirty="0">
+              <a:rPr lang="en-US" sz="1800" dirty="0">
                 <a:solidFill>
                   <a:srgbClr val="1B1B1F"/>
                 </a:solidFill>
@@ -11538,7 +11538,7 @@
               <a:t>One-Time-Pad: zufällig, so lang wie die Nachricht, geheim, </a:t>
             </a:r>
             <a:r>
-              <a:rPr lang="en-US" sz="2200" b="1" dirty="0">
+              <a:rPr lang="en-US" sz="1800" b="1" dirty="0">
                 <a:solidFill>
                   <a:srgbClr val="1B1B1F"/>
                 </a:solidFill>
@@ -11546,14 +11546,14 @@
               <a:t>nur einmal</a:t>
             </a:r>
             <a:r>
-              <a:rPr lang="en-US" sz="2200" dirty="0">
+              <a:rPr lang="en-US" sz="1800" dirty="0">
                 <a:solidFill>
                   <a:srgbClr val="1B1B1F"/>
                 </a:solidFill>
               </a:rPr>
               <a:t> – sonst C1 ⊕ C2 = M1 ⊕ M2</a:t>
             </a:r>
-            <a:endParaRPr lang="en-US" sz="2200" dirty="0"/>
+            <a:endParaRPr lang="en-US" sz="1800" dirty="0"/>
           </a:p>
         </p:txBody>
       </p:sp>
@@ -11565,8 +11565,8 @@
         </p:nvSpPr>
         <p:spPr>
           <a:xfrm>
-            <a:off x="1508760" y="3951224"/>
-            <a:ext cx="9174175" cy="727456"/>
+            <a:off x="1508760" y="3982212"/>
+            <a:ext cx="5394960" cy="603504"/>
           </a:xfrm>
           <a:prstGeom prst="rect">
             <a:avLst/>
@@ -11582,14 +11582,14 @@
               <a:buNone/>
             </a:pPr>
             <a:r>
-              <a:rPr lang="en-US" sz="2200" dirty="0">
+              <a:rPr lang="en-US" sz="1800" dirty="0">
                 <a:solidFill>
                   <a:srgbClr val="1B1B1F"/>
                 </a:solidFill>
               </a:rPr>
               <a:t>Blockchiffre: Runden aus ⊕ Rundenschlüssel, S-Box (Konfusion) und Permutation (Diffusion)</a:t>
             </a:r>
-            <a:endParaRPr lang="en-US" sz="2200" dirty="0"/>
+            <a:endParaRPr lang="en-US" sz="1800" dirty="0"/>
           </a:p>
         </p:txBody>
       </p:sp>
@@ -11601,8 +11601,8 @@
         </p:nvSpPr>
         <p:spPr>
           <a:xfrm>
-            <a:off x="1508760" y="4806696"/>
-            <a:ext cx="9174175" cy="386588"/>
+            <a:off x="1508760" y="4713732"/>
+            <a:ext cx="5394960" cy="603504"/>
           </a:xfrm>
           <a:prstGeom prst="rect">
             <a:avLst/>
@@ -11618,14 +11618,14 @@
               <a:buNone/>
             </a:pPr>
             <a:r>
-              <a:rPr lang="en-US" sz="2200" dirty="0">
+              <a:rPr lang="en-US" sz="1800" dirty="0">
                 <a:solidFill>
                   <a:srgbClr val="1B1B1F"/>
                 </a:solidFill>
               </a:rPr>
               <a:t>ECB zeigt gleiche Blöcke, CBC verkettet die Blöcke</a:t>
             </a:r>
-            <a:endParaRPr lang="en-US" sz="2200" dirty="0"/>
+            <a:endParaRPr lang="en-US" sz="1800" dirty="0"/>
           </a:p>
         </p:txBody>
       </p:sp>
@@ -13196,7 +13196,7 @@
                         <a:buNone/>
                       </a:pPr>
                       <a:r>
-                        <a:rPr lang="en-US" sz="1600" b="1" dirty="0">
+                        <a:rPr lang="en-US" sz="2000" b="1" dirty="0">
                           <a:solidFill>
                             <a:srgbClr val="1B1B1F"/>
                           </a:solidFill>
@@ -13206,7 +13206,7 @@
                         </a:rPr>
                         <a:t>Zeichen</a:t>
                       </a:r>
-                      <a:endParaRPr lang="en-US" sz="1600" dirty="0">
+                      <a:endParaRPr lang="en-US" sz="2000" dirty="0">
                         <a:latin typeface="Calibri" charset="0"/>
                         <a:ea typeface="Calibri" charset="0"/>
                         <a:cs typeface="Calibri" charset="0"/>
@@ -13264,7 +13264,7 @@
                         <a:buNone/>
                       </a:pPr>
                       <a:r>
-                        <a:rPr lang="en-US" sz="1600" b="1" dirty="0">
+                        <a:rPr lang="en-US" sz="2000" b="1" dirty="0">
                           <a:solidFill>
                             <a:srgbClr val="1B1B1F"/>
                           </a:solidFill>
@@ -13274,7 +13274,7 @@
                         </a:rPr>
                         <a:t>ASCII (dezimal)</a:t>
                       </a:r>
-                      <a:endParaRPr lang="en-US" sz="1600" dirty="0">
+                      <a:endParaRPr lang="en-US" sz="2000" dirty="0">
                         <a:latin typeface="Calibri" charset="0"/>
                         <a:ea typeface="Calibri" charset="0"/>
                         <a:cs typeface="Calibri" charset="0"/>
@@ -13332,7 +13332,7 @@
                         <a:buNone/>
                       </a:pPr>
                       <a:r>
-                        <a:rPr lang="en-US" sz="1600" b="1" dirty="0">
+                        <a:rPr lang="en-US" sz="2000" b="1" dirty="0">
                           <a:solidFill>
                             <a:srgbClr val="1B1B1F"/>
                           </a:solidFill>
@@ -13342,7 +13342,7 @@
                         </a:rPr>
                         <a:t>Bits</a:t>
                       </a:r>
-                      <a:endParaRPr lang="en-US" sz="1600" dirty="0">
+                      <a:endParaRPr lang="en-US" sz="2000" dirty="0">
                         <a:latin typeface="Calibri" charset="0"/>
                         <a:ea typeface="Calibri" charset="0"/>
                         <a:cs typeface="Calibri" charset="0"/>
@@ -13402,7 +13402,7 @@
                         <a:buNone/>
                       </a:pPr>
                       <a:r>
-                        <a:rPr lang="en-US" sz="1600" dirty="0">
+                        <a:rPr lang="en-US" sz="2000" dirty="0">
                           <a:solidFill>
                             <a:srgbClr val="1B1B1F"/>
                           </a:solidFill>
@@ -13412,7 +13412,7 @@
                         </a:rPr>
                         <a:t>A</a:t>
                       </a:r>
-                      <a:endParaRPr lang="en-US" sz="1600" dirty="0">
+                      <a:endParaRPr lang="en-US" sz="2000" dirty="0">
                         <a:latin typeface="Calibri" charset="0"/>
                         <a:ea typeface="Calibri" charset="0"/>
                         <a:cs typeface="Calibri" charset="0"/>
@@ -13470,7 +13470,7 @@
                         <a:buNone/>
                       </a:pPr>
                       <a:r>
-                        <a:rPr lang="en-US" sz="1600" dirty="0">
+                        <a:rPr lang="en-US" sz="2000" dirty="0">
                           <a:solidFill>
                             <a:srgbClr val="1B1B1F"/>
                           </a:solidFill>
@@ -13480,7 +13480,7 @@
                         </a:rPr>
                         <a:t>65</a:t>
                       </a:r>
-                      <a:endParaRPr lang="en-US" sz="1600" dirty="0">
+                      <a:endParaRPr lang="en-US" sz="2000" dirty="0">
                         <a:latin typeface="Calibri" charset="0"/>
                         <a:ea typeface="Calibri" charset="0"/>
                         <a:cs typeface="Calibri" charset="0"/>
@@ -13538,7 +13538,7 @@
                         <a:buNone/>
                       </a:pPr>
                       <a:r>
-                        <a:rPr lang="en-US" sz="1600" dirty="0">
+                        <a:rPr lang="en-US" sz="2000" dirty="0">
                           <a:solidFill>
                             <a:srgbClr val="1B1B1F"/>
                           </a:solidFill>
@@ -13548,7 +13548,7 @@
                         </a:rPr>
                         <a:t>0100 0001</a:t>
                       </a:r>
-                      <a:endParaRPr lang="en-US" sz="1600" dirty="0">
+                      <a:endParaRPr lang="en-US" sz="2000" dirty="0">
                         <a:latin typeface="Calibri" charset="0"/>
                         <a:ea typeface="Calibri" charset="0"/>
                         <a:cs typeface="Calibri" charset="0"/>
@@ -13608,7 +13608,7 @@
                         <a:buNone/>
                       </a:pPr>
                       <a:r>
-                        <a:rPr lang="en-US" sz="1600" dirty="0">
+                        <a:rPr lang="en-US" sz="2000" dirty="0">
                           <a:solidFill>
                             <a:srgbClr val="1B1B1F"/>
                           </a:solidFill>
@@ -13618,7 +13618,7 @@
                         </a:rPr>
                         <a:t>J</a:t>
                       </a:r>
-                      <a:endParaRPr lang="en-US" sz="1600" dirty="0">
+                      <a:endParaRPr lang="en-US" sz="2000" dirty="0">
                         <a:latin typeface="Calibri" charset="0"/>
                         <a:ea typeface="Calibri" charset="0"/>
                         <a:cs typeface="Calibri" charset="0"/>
@@ -13676,7 +13676,7 @@
                         <a:buNone/>
                       </a:pPr>
                       <a:r>
-                        <a:rPr lang="en-US" sz="1600" dirty="0">
+                        <a:rPr lang="en-US" sz="2000" dirty="0">
                           <a:solidFill>
                             <a:srgbClr val="1B1B1F"/>
                           </a:solidFill>
@@ -13686,7 +13686,7 @@
                         </a:rPr>
                         <a:t>74</a:t>
                       </a:r>
-                      <a:endParaRPr lang="en-US" sz="1600" dirty="0">
+                      <a:endParaRPr lang="en-US" sz="2000" dirty="0">
                         <a:latin typeface="Calibri" charset="0"/>
                         <a:ea typeface="Calibri" charset="0"/>
                         <a:cs typeface="Calibri" charset="0"/>
@@ -13744,7 +13744,7 @@
                         <a:buNone/>
                       </a:pPr>
                       <a:r>
-                        <a:rPr lang="en-US" sz="1600" dirty="0">
+                        <a:rPr lang="en-US" sz="2000" dirty="0">
                           <a:solidFill>
                             <a:srgbClr val="1B1B1F"/>
                           </a:solidFill>
@@ -13754,7 +13754,7 @@
                         </a:rPr>
                         <a:t>0100 1010</a:t>
                       </a:r>
-                      <a:endParaRPr lang="en-US" sz="1600" dirty="0">
+                      <a:endParaRPr lang="en-US" sz="2000" dirty="0">
                         <a:latin typeface="Calibri" charset="0"/>
                         <a:ea typeface="Calibri" charset="0"/>
                         <a:cs typeface="Calibri" charset="0"/>
@@ -13814,7 +13814,7 @@
                         <a:buNone/>
                       </a:pPr>
                       <a:r>
-                        <a:rPr lang="en-US" sz="1600" dirty="0">
+                        <a:rPr lang="en-US" sz="2000" dirty="0">
                           <a:solidFill>
                             <a:srgbClr val="1B1B1F"/>
                           </a:solidFill>
@@ -13824,7 +13824,7 @@
                         </a:rPr>
                         <a:t>N</a:t>
                       </a:r>
-                      <a:endParaRPr lang="en-US" sz="1600" dirty="0">
+                      <a:endParaRPr lang="en-US" sz="2000" dirty="0">
                         <a:latin typeface="Calibri" charset="0"/>
                         <a:ea typeface="Calibri" charset="0"/>
                         <a:cs typeface="Calibri" charset="0"/>
@@ -13882,7 +13882,7 @@
                         <a:buNone/>
                       </a:pPr>
                       <a:r>
-                        <a:rPr lang="en-US" sz="1600" dirty="0">
+                        <a:rPr lang="en-US" sz="2000" dirty="0">
                           <a:solidFill>
                             <a:srgbClr val="1B1B1F"/>
                           </a:solidFill>
@@ -13892,7 +13892,7 @@
                         </a:rPr>
                         <a:t>78</a:t>
                       </a:r>
-                      <a:endParaRPr lang="en-US" sz="1600" dirty="0">
+                      <a:endParaRPr lang="en-US" sz="2000" dirty="0">
                         <a:latin typeface="Calibri" charset="0"/>
                         <a:ea typeface="Calibri" charset="0"/>
                         <a:cs typeface="Calibri" charset="0"/>
@@ -13950,7 +13950,7 @@
                         <a:buNone/>
                       </a:pPr>
                       <a:r>
-                        <a:rPr lang="en-US" sz="1600" dirty="0">
+                        <a:rPr lang="en-US" sz="2000" dirty="0">
                           <a:solidFill>
                             <a:srgbClr val="1B1B1F"/>
                           </a:solidFill>
@@ -13960,7 +13960,7 @@
                         </a:rPr>
                         <a:t>0100 1110</a:t>
                       </a:r>
-                      <a:endParaRPr lang="en-US" sz="1600" dirty="0">
+                      <a:endParaRPr lang="en-US" sz="2000" dirty="0">
                         <a:latin typeface="Calibri" charset="0"/>
                         <a:ea typeface="Calibri" charset="0"/>
                         <a:cs typeface="Calibri" charset="0"/>
@@ -14020,7 +14020,7 @@
                         <a:buNone/>
                       </a:pPr>
                       <a:r>
-                        <a:rPr lang="en-US" sz="1600" dirty="0">
+                        <a:rPr lang="en-US" sz="2000" dirty="0">
                           <a:solidFill>
                             <a:srgbClr val="1B1B1F"/>
                           </a:solidFill>
@@ -14030,7 +14030,7 @@
                         </a:rPr>
                         <a:t>Z</a:t>
                       </a:r>
-                      <a:endParaRPr lang="en-US" sz="1600" dirty="0">
+                      <a:endParaRPr lang="en-US" sz="2000" dirty="0">
                         <a:latin typeface="Calibri" charset="0"/>
                         <a:ea typeface="Calibri" charset="0"/>
                         <a:cs typeface="Calibri" charset="0"/>
@@ -14088,7 +14088,7 @@
                         <a:buNone/>
                       </a:pPr>
                       <a:r>
-                        <a:rPr lang="en-US" sz="1600" dirty="0">
+                        <a:rPr lang="en-US" sz="2000" dirty="0">
                           <a:solidFill>
                             <a:srgbClr val="1B1B1F"/>
                           </a:solidFill>
@@ -14098,7 +14098,7 @@
                         </a:rPr>
                         <a:t>90</a:t>
                       </a:r>
-                      <a:endParaRPr lang="en-US" sz="1600" dirty="0">
+                      <a:endParaRPr lang="en-US" sz="2000" dirty="0">
                         <a:latin typeface="Calibri" charset="0"/>
                         <a:ea typeface="Calibri" charset="0"/>
                         <a:cs typeface="Calibri" charset="0"/>
@@ -14156,7 +14156,7 @@
                         <a:buNone/>
                       </a:pPr>
                       <a:r>
-                        <a:rPr lang="en-US" sz="1600" dirty="0">
+                        <a:rPr lang="en-US" sz="2000" dirty="0">
                           <a:solidFill>
                             <a:srgbClr val="1B1B1F"/>
                           </a:solidFill>
@@ -14166,7 +14166,7 @@
                         </a:rPr>
                         <a:t>0101 1010</a:t>
                       </a:r>
-                      <a:endParaRPr lang="en-US" sz="1600" dirty="0">
+                      <a:endParaRPr lang="en-US" sz="2000" dirty="0">
                         <a:latin typeface="Calibri" charset="0"/>
                         <a:ea typeface="Calibri" charset="0"/>
                         <a:cs typeface="Calibri" charset="0"/>
@@ -14555,7 +14555,7 @@
                         <a:buNone/>
                       </a:pPr>
                       <a:r>
-                        <a:rPr lang="en-US" sz="1600" b="1" dirty="0">
+                        <a:rPr lang="en-US" sz="2000" b="1" dirty="0">
                           <a:solidFill>
                             <a:srgbClr val="1B1B1F"/>
                           </a:solidFill>
@@ -14565,7 +14565,7 @@
                         </a:rPr>
                         <a:t>a</a:t>
                       </a:r>
-                      <a:endParaRPr lang="en-US" sz="1600" dirty="0">
+                      <a:endParaRPr lang="en-US" sz="2000" dirty="0">
                         <a:latin typeface="Calibri" charset="0"/>
                         <a:ea typeface="Calibri" charset="0"/>
                         <a:cs typeface="Calibri" charset="0"/>
@@ -14623,7 +14623,7 @@
                         <a:buNone/>
                       </a:pPr>
                       <a:r>
-                        <a:rPr lang="en-US" sz="1600" b="1" dirty="0">
+                        <a:rPr lang="en-US" sz="2000" b="1" dirty="0">
                           <a:solidFill>
                             <a:srgbClr val="1B1B1F"/>
                           </a:solidFill>
@@ -14633,7 +14633,7 @@
                         </a:rPr>
                         <a:t>b</a:t>
                       </a:r>
-                      <a:endParaRPr lang="en-US" sz="1600" dirty="0">
+                      <a:endParaRPr lang="en-US" sz="2000" dirty="0">
                         <a:latin typeface="Calibri" charset="0"/>
                         <a:ea typeface="Calibri" charset="0"/>
                         <a:cs typeface="Calibri" charset="0"/>
@@ -14691,7 +14691,7 @@
                         <a:buNone/>
                       </a:pPr>
                       <a:r>
-                        <a:rPr lang="en-US" sz="1600" b="1" dirty="0">
+                        <a:rPr lang="en-US" sz="2000" b="1" dirty="0">
                           <a:solidFill>
                             <a:srgbClr val="1B1B1F"/>
                           </a:solidFill>
@@ -14701,7 +14701,7 @@
                         </a:rPr>
                         <a:t>a ⊕ b</a:t>
                       </a:r>
-                      <a:endParaRPr lang="en-US" sz="1600" dirty="0">
+                      <a:endParaRPr lang="en-US" sz="2000" dirty="0">
                         <a:latin typeface="Calibri" charset="0"/>
                         <a:ea typeface="Calibri" charset="0"/>
                         <a:cs typeface="Calibri" charset="0"/>
@@ -14761,7 +14761,7 @@
                         <a:buNone/>
                       </a:pPr>
                       <a:r>
-                        <a:rPr lang="en-US" sz="1600" dirty="0">
+                        <a:rPr lang="en-US" sz="2000" dirty="0">
                           <a:solidFill>
                             <a:srgbClr val="1B1B1F"/>
                           </a:solidFill>
@@ -14771,7 +14771,7 @@
                         </a:rPr>
                         <a:t>0</a:t>
                       </a:r>
-                      <a:endParaRPr lang="en-US" sz="1600" dirty="0">
+                      <a:endParaRPr lang="en-US" sz="2000" dirty="0">
                         <a:latin typeface="Calibri" charset="0"/>
                         <a:ea typeface="Calibri" charset="0"/>
                         <a:cs typeface="Calibri" charset="0"/>
@@ -14829,7 +14829,7 @@
                         <a:buNone/>
                       </a:pPr>
                       <a:r>
-                        <a:rPr lang="en-US" sz="1600" dirty="0">
+                        <a:rPr lang="en-US" sz="2000" dirty="0">
                           <a:solidFill>
                             <a:srgbClr val="1B1B1F"/>
                           </a:solidFill>
@@ -14839,7 +14839,7 @@
                         </a:rPr>
                         <a:t>0</a:t>
                       </a:r>
-                      <a:endParaRPr lang="en-US" sz="1600" dirty="0">
+                      <a:endParaRPr lang="en-US" sz="2000" dirty="0">
                         <a:latin typeface="Calibri" charset="0"/>
                         <a:ea typeface="Calibri" charset="0"/>
                         <a:cs typeface="Calibri" charset="0"/>
@@ -14897,7 +14897,7 @@
                         <a:buNone/>
                       </a:pPr>
                       <a:r>
-                        <a:rPr lang="en-US" sz="1600" dirty="0">
+                        <a:rPr lang="en-US" sz="2000" dirty="0">
                           <a:solidFill>
                             <a:srgbClr val="1B1B1F"/>
                           </a:solidFill>
@@ -14907,7 +14907,7 @@
                         </a:rPr>
                         <a:t>0</a:t>
                       </a:r>
-                      <a:endParaRPr lang="en-US" sz="1600" dirty="0">
+                      <a:endParaRPr lang="en-US" sz="2000" dirty="0">
                         <a:latin typeface="Calibri" charset="0"/>
                         <a:ea typeface="Calibri" charset="0"/>
                         <a:cs typeface="Calibri" charset="0"/>
@@ -14967,7 +14967,7 @@
                         <a:buNone/>
                       </a:pPr>
                       <a:r>
-                        <a:rPr lang="en-US" sz="1600" dirty="0">
+                        <a:rPr lang="en-US" sz="2000" dirty="0">
                           <a:solidFill>
                             <a:srgbClr val="1B1B1F"/>
                           </a:solidFill>
@@ -14977,7 +14977,7 @@
                         </a:rPr>
                         <a:t>0</a:t>
                       </a:r>
-                      <a:endParaRPr lang="en-US" sz="1600" dirty="0">
+                      <a:endParaRPr lang="en-US" sz="2000" dirty="0">
                         <a:latin typeface="Calibri" charset="0"/>
                         <a:ea typeface="Calibri" charset="0"/>
                         <a:cs typeface="Calibri" charset="0"/>
@@ -15035,7 +15035,7 @@
                         <a:buNone/>
                       </a:pPr>
                       <a:r>
-                        <a:rPr lang="en-US" sz="1600" dirty="0">
+                        <a:rPr lang="en-US" sz="2000" dirty="0">
                           <a:solidFill>
                             <a:srgbClr val="1B1B1F"/>
                           </a:solidFill>
@@ -15045,7 +15045,7 @@
                         </a:rPr>
                         <a:t>1</a:t>
                       </a:r>
-                      <a:endParaRPr lang="en-US" sz="1600" dirty="0">
+                      <a:endParaRPr lang="en-US" sz="2000" dirty="0">
                         <a:latin typeface="Calibri" charset="0"/>
                         <a:ea typeface="Calibri" charset="0"/>
                         <a:cs typeface="Calibri" charset="0"/>
@@ -15103,7 +15103,7 @@
                         <a:buNone/>
                       </a:pPr>
                       <a:r>
-                        <a:rPr lang="en-US" sz="1600" dirty="0">
+                        <a:rPr lang="en-US" sz="2000" dirty="0">
                           <a:solidFill>
                             <a:srgbClr val="1B1B1F"/>
                           </a:solidFill>
@@ -15113,7 +15113,7 @@
                         </a:rPr>
                         <a:t>1</a:t>
                       </a:r>
-                      <a:endParaRPr lang="en-US" sz="1600" dirty="0">
+                      <a:endParaRPr lang="en-US" sz="2000" dirty="0">
                         <a:latin typeface="Calibri" charset="0"/>
                         <a:ea typeface="Calibri" charset="0"/>
                         <a:cs typeface="Calibri" charset="0"/>
@@ -15173,7 +15173,7 @@
                         <a:buNone/>
                       </a:pPr>
                       <a:r>
-                        <a:rPr lang="en-US" sz="1600" dirty="0">
+                        <a:rPr lang="en-US" sz="2000" dirty="0">
                           <a:solidFill>
                             <a:srgbClr val="1B1B1F"/>
                           </a:solidFill>
@@ -15183,7 +15183,7 @@
                         </a:rPr>
                         <a:t>1</a:t>
                       </a:r>
-                      <a:endParaRPr lang="en-US" sz="1600" dirty="0">
+                      <a:endParaRPr lang="en-US" sz="2000" dirty="0">
                         <a:latin typeface="Calibri" charset="0"/>
                         <a:ea typeface="Calibri" charset="0"/>
                         <a:cs typeface="Calibri" charset="0"/>
@@ -15241,7 +15241,7 @@
                         <a:buNone/>
                       </a:pPr>
                       <a:r>
-                        <a:rPr lang="en-US" sz="1600" dirty="0">
+                        <a:rPr lang="en-US" sz="2000" dirty="0">
                           <a:solidFill>
                             <a:srgbClr val="1B1B1F"/>
                           </a:solidFill>
@@ -15251,7 +15251,7 @@
                         </a:rPr>
                         <a:t>0</a:t>
                       </a:r>
-                      <a:endParaRPr lang="en-US" sz="1600" dirty="0">
+                      <a:endParaRPr lang="en-US" sz="2000" dirty="0">
                         <a:latin typeface="Calibri" charset="0"/>
                         <a:ea typeface="Calibri" charset="0"/>
                         <a:cs typeface="Calibri" charset="0"/>
@@ -15309,7 +15309,7 @@
                         <a:buNone/>
                       </a:pPr>
                       <a:r>
-                        <a:rPr lang="en-US" sz="1600" dirty="0">
+                        <a:rPr lang="en-US" sz="2000" dirty="0">
                           <a:solidFill>
                             <a:srgbClr val="1B1B1F"/>
                           </a:solidFill>
@@ -15319,7 +15319,7 @@
                         </a:rPr>
                         <a:t>1</a:t>
                       </a:r>
-                      <a:endParaRPr lang="en-US" sz="1600" dirty="0">
+                      <a:endParaRPr lang="en-US" sz="2000" dirty="0">
                         <a:latin typeface="Calibri" charset="0"/>
                         <a:ea typeface="Calibri" charset="0"/>
                         <a:cs typeface="Calibri" charset="0"/>
@@ -15379,7 +15379,7 @@
                         <a:buNone/>
                       </a:pPr>
                       <a:r>
-                        <a:rPr lang="en-US" sz="1600" dirty="0">
+                        <a:rPr lang="en-US" sz="2000" dirty="0">
                           <a:solidFill>
                             <a:srgbClr val="1B1B1F"/>
                           </a:solidFill>
@@ -15389,7 +15389,7 @@
                         </a:rPr>
                         <a:t>1</a:t>
                       </a:r>
-                      <a:endParaRPr lang="en-US" sz="1600" dirty="0">
+                      <a:endParaRPr lang="en-US" sz="2000" dirty="0">
                         <a:latin typeface="Calibri" charset="0"/>
                         <a:ea typeface="Calibri" charset="0"/>
                         <a:cs typeface="Calibri" charset="0"/>
@@ -15447,7 +15447,7 @@
                         <a:buNone/>
                       </a:pPr>
                       <a:r>
-                        <a:rPr lang="en-US" sz="1600" dirty="0">
+                        <a:rPr lang="en-US" sz="2000" dirty="0">
                           <a:solidFill>
                             <a:srgbClr val="1B1B1F"/>
                           </a:solidFill>
@@ -15457,7 +15457,7 @@
                         </a:rPr>
                         <a:t>1</a:t>
                       </a:r>
-                      <a:endParaRPr lang="en-US" sz="1600" dirty="0">
+                      <a:endParaRPr lang="en-US" sz="2000" dirty="0">
                         <a:latin typeface="Calibri" charset="0"/>
                         <a:ea typeface="Calibri" charset="0"/>
                         <a:cs typeface="Calibri" charset="0"/>
@@ -15515,7 +15515,7 @@
                         <a:buNone/>
                       </a:pPr>
                       <a:r>
-                        <a:rPr lang="en-US" sz="1600" dirty="0">
+                        <a:rPr lang="en-US" sz="2000" dirty="0">
                           <a:solidFill>
                             <a:srgbClr val="1B1B1F"/>
                           </a:solidFill>
@@ -15525,7 +15525,7 @@
                         </a:rPr>
                         <a:t>0</a:t>
                       </a:r>
-                      <a:endParaRPr lang="en-US" sz="1600" dirty="0">
+                      <a:endParaRPr lang="en-US" sz="2000" dirty="0">
                         <a:latin typeface="Calibri" charset="0"/>
                         <a:ea typeface="Calibri" charset="0"/>
                         <a:cs typeface="Calibri" charset="0"/>
@@ -16581,7 +16581,7 @@
                         <a:buNone/>
                       </a:pPr>
                       <a:r>
-                        <a:rPr lang="en-US" sz="1600" b="1" dirty="0">
+                        <a:rPr lang="en-US" sz="1500" b="1" dirty="0">
                           <a:solidFill>
                             <a:srgbClr val="1B1B1F"/>
                           </a:solidFill>
@@ -16591,7 +16591,7 @@
                         </a:rPr>
                         <a:t>Bits</a:t>
                       </a:r>
-                      <a:endParaRPr lang="en-US" sz="1600" dirty="0">
+                      <a:endParaRPr lang="en-US" sz="1500" dirty="0">
                         <a:latin typeface="Calibri" charset="0"/>
                         <a:ea typeface="Calibri" charset="0"/>
                         <a:cs typeface="Calibri" charset="0"/>
@@ -16649,7 +16649,7 @@
                         <a:buNone/>
                       </a:pPr>
                       <a:r>
-                        <a:rPr lang="en-US" sz="1600" b="1" dirty="0">
+                        <a:rPr lang="en-US" sz="1500" b="1" dirty="0">
                           <a:solidFill>
                             <a:srgbClr val="1B1B1F"/>
                           </a:solidFill>
@@ -16659,7 +16659,7 @@
                         </a:rPr>
                         <a:t>Text</a:t>
                       </a:r>
-                      <a:endParaRPr lang="en-US" sz="1600" dirty="0">
+                      <a:endParaRPr lang="en-US" sz="1500" dirty="0">
                         <a:latin typeface="Calibri" charset="0"/>
                         <a:ea typeface="Calibri" charset="0"/>
                         <a:cs typeface="Calibri" charset="0"/>
@@ -16719,7 +16719,7 @@
                         <a:buNone/>
                       </a:pPr>
                       <a:r>
-                        <a:rPr lang="en-US" sz="1600" dirty="0">
+                        <a:rPr lang="en-US" sz="1500" dirty="0">
                           <a:solidFill>
                             <a:srgbClr val="1B1B1F"/>
                           </a:solidFill>
@@ -16729,7 +16729,7 @@
                         </a:rPr>
                         <a:t>Schlüssel K</a:t>
                       </a:r>
-                      <a:endParaRPr lang="en-US" sz="1600" dirty="0">
+                      <a:endParaRPr lang="en-US" sz="1500" dirty="0">
                         <a:latin typeface="Calibri" charset="0"/>
                         <a:ea typeface="Calibri" charset="0"/>
                         <a:cs typeface="Calibri" charset="0"/>
@@ -16787,7 +16787,7 @@
                         <a:buNone/>
                       </a:pPr>
                       <a:r>
-                        <a:rPr lang="en-US" sz="1600" dirty="0">
+                        <a:rPr lang="en-US" sz="1500" dirty="0">
                           <a:solidFill>
                             <a:srgbClr val="1B1B1F"/>
                           </a:solidFill>
@@ -16797,7 +16797,7 @@
                         </a:rPr>
                         <a:t>1101 0011 | 0110 1001 | 1010 1110</a:t>
                       </a:r>
-                      <a:endParaRPr lang="en-US" sz="1600" dirty="0">
+                      <a:endParaRPr lang="en-US" sz="1500" dirty="0">
                         <a:latin typeface="Calibri" charset="0"/>
                         <a:ea typeface="Calibri" charset="0"/>
                         <a:cs typeface="Calibri" charset="0"/>
@@ -16907,7 +16907,7 @@
                         <a:buNone/>
                       </a:pPr>
                       <a:r>
-                        <a:rPr lang="en-US" sz="1600" dirty="0">
+                        <a:rPr lang="en-US" sz="1500" dirty="0">
                           <a:solidFill>
                             <a:srgbClr val="1B1B1F"/>
                           </a:solidFill>
@@ -16917,7 +16917,7 @@
                         </a:rPr>
                         <a:t>M1</a:t>
                       </a:r>
-                      <a:endParaRPr lang="en-US" sz="1600" dirty="0">
+                      <a:endParaRPr lang="en-US" sz="1500" dirty="0">
                         <a:latin typeface="Calibri" charset="0"/>
                         <a:ea typeface="Calibri" charset="0"/>
                         <a:cs typeface="Calibri" charset="0"/>
@@ -16975,7 +16975,7 @@
                         <a:buNone/>
                       </a:pPr>
                       <a:r>
-                        <a:rPr lang="en-US" sz="1600" dirty="0">
+                        <a:rPr lang="en-US" sz="1500" dirty="0">
                           <a:solidFill>
                             <a:srgbClr val="1B1B1F"/>
                           </a:solidFill>
@@ -16985,7 +16985,7 @@
                         </a:rPr>
                         <a:t>0100 1110 | 0100 0101 | 0101 0101</a:t>
                       </a:r>
-                      <a:endParaRPr lang="en-US" sz="1600" dirty="0">
+                      <a:endParaRPr lang="en-US" sz="1500" dirty="0">
                         <a:latin typeface="Calibri" charset="0"/>
                         <a:ea typeface="Calibri" charset="0"/>
                         <a:cs typeface="Calibri" charset="0"/>
@@ -17043,7 +17043,7 @@
                         <a:buNone/>
                       </a:pPr>
                       <a:r>
-                        <a:rPr lang="en-US" sz="1600" dirty="0">
+                        <a:rPr lang="en-US" sz="1500" dirty="0">
                           <a:solidFill>
                             <a:srgbClr val="1B1B1F"/>
                           </a:solidFill>
@@ -17053,7 +17053,7 @@
                         </a:rPr>
                         <a:t>NEU</a:t>
                       </a:r>
-                      <a:endParaRPr lang="en-US" sz="1600" dirty="0">
+                      <a:endParaRPr lang="en-US" sz="1500" dirty="0">
                         <a:latin typeface="Calibri" charset="0"/>
                         <a:ea typeface="Calibri" charset="0"/>
                         <a:cs typeface="Calibri" charset="0"/>
@@ -17113,7 +17113,7 @@
                         <a:buNone/>
                       </a:pPr>
                       <a:r>
-                        <a:rPr lang="en-US" sz="1600" dirty="0">
+                        <a:rPr lang="en-US" sz="1500" dirty="0">
                           <a:solidFill>
                             <a:srgbClr val="1B1B1F"/>
                           </a:solidFill>
@@ -17123,7 +17123,7 @@
                         </a:rPr>
                         <a:t>C1 = M1 ⊕ K</a:t>
                       </a:r>
-                      <a:endParaRPr lang="en-US" sz="1600" dirty="0">
+                      <a:endParaRPr lang="en-US" sz="1500" dirty="0">
                         <a:latin typeface="Calibri" charset="0"/>
                         <a:ea typeface="Calibri" charset="0"/>
                         <a:cs typeface="Calibri" charset="0"/>
@@ -17181,7 +17181,7 @@
                         <a:buNone/>
                       </a:pPr>
                       <a:r>
-                        <a:rPr lang="en-US" sz="1600" dirty="0">
+                        <a:rPr lang="en-US" sz="1500" dirty="0">
                           <a:solidFill>
                             <a:srgbClr val="1B1B1F"/>
                           </a:solidFill>
@@ -17191,7 +17191,7 @@
                         </a:rPr>
                         <a:t>1001 1101 | 0010 1100 | 1111 1011</a:t>
                       </a:r>
-                      <a:endParaRPr lang="en-US" sz="1600" dirty="0">
+                      <a:endParaRPr lang="en-US" sz="1500" dirty="0">
                         <a:latin typeface="Calibri" charset="0"/>
                         <a:ea typeface="Calibri" charset="0"/>
                         <a:cs typeface="Calibri" charset="0"/>
@@ -17301,7 +17301,7 @@
                         <a:buNone/>
                       </a:pPr>
                       <a:r>
-                        <a:rPr lang="en-US" sz="1600" dirty="0">
+                        <a:rPr lang="en-US" sz="1500" dirty="0">
                           <a:solidFill>
                             <a:srgbClr val="1B1B1F"/>
                           </a:solidFill>
@@ -17311,7 +17311,7 @@
                         </a:rPr>
                         <a:t>M2</a:t>
                       </a:r>
-                      <a:endParaRPr lang="en-US" sz="1600" dirty="0">
+                      <a:endParaRPr lang="en-US" sz="1500" dirty="0">
                         <a:latin typeface="Calibri" charset="0"/>
                         <a:ea typeface="Calibri" charset="0"/>
                         <a:cs typeface="Calibri" charset="0"/>
@@ -17369,7 +17369,7 @@
                         <a:buNone/>
                       </a:pPr>
                       <a:r>
-                        <a:rPr lang="en-US" sz="1600" dirty="0">
+                        <a:rPr lang="en-US" sz="1500" dirty="0">
                           <a:solidFill>
                             <a:srgbClr val="1B1B1F"/>
                           </a:solidFill>
@@ -17379,7 +17379,7 @@
                         </a:rPr>
                         <a:t>0100 0001 | 0100 1100 | 0101 0100</a:t>
                       </a:r>
-                      <a:endParaRPr lang="en-US" sz="1600" dirty="0">
+                      <a:endParaRPr lang="en-US" sz="1500" dirty="0">
                         <a:latin typeface="Calibri" charset="0"/>
                         <a:ea typeface="Calibri" charset="0"/>
                         <a:cs typeface="Calibri" charset="0"/>
@@ -17437,7 +17437,7 @@
                         <a:buNone/>
                       </a:pPr>
                       <a:r>
-                        <a:rPr lang="en-US" sz="1600" dirty="0">
+                        <a:rPr lang="en-US" sz="1500" dirty="0">
                           <a:solidFill>
                             <a:srgbClr val="1B1B1F"/>
                           </a:solidFill>
@@ -17447,7 +17447,7 @@
                         </a:rPr>
                         <a:t>ALT</a:t>
                       </a:r>
-                      <a:endParaRPr lang="en-US" sz="1600" dirty="0">
+                      <a:endParaRPr lang="en-US" sz="1500" dirty="0">
                         <a:latin typeface="Calibri" charset="0"/>
                         <a:ea typeface="Calibri" charset="0"/>
                         <a:cs typeface="Calibri" charset="0"/>
@@ -17507,7 +17507,7 @@
                         <a:buNone/>
                       </a:pPr>
                       <a:r>
-                        <a:rPr lang="en-US" sz="1600" dirty="0">
+                        <a:rPr lang="en-US" sz="1500" dirty="0">
                           <a:solidFill>
                             <a:srgbClr val="1B1B1F"/>
                           </a:solidFill>
@@ -17517,7 +17517,7 @@
                         </a:rPr>
                         <a:t>C2 = M2 ⊕ K</a:t>
                       </a:r>
-                      <a:endParaRPr lang="en-US" sz="1600" dirty="0">
+                      <a:endParaRPr lang="en-US" sz="1500" dirty="0">
                         <a:latin typeface="Calibri" charset="0"/>
                         <a:ea typeface="Calibri" charset="0"/>
                         <a:cs typeface="Calibri" charset="0"/>
@@ -17575,7 +17575,7 @@
                         <a:buNone/>
                       </a:pPr>
                       <a:r>
-                        <a:rPr lang="en-US" sz="1600" dirty="0">
+                        <a:rPr lang="en-US" sz="1500" dirty="0">
                           <a:solidFill>
                             <a:srgbClr val="1B1B1F"/>
                           </a:solidFill>
@@ -17585,7 +17585,7 @@
                         </a:rPr>
                         <a:t>1001 0010 | 0010 0101 | 1111 1010</a:t>
                       </a:r>
-                      <a:endParaRPr lang="en-US" sz="1600" dirty="0">
+                      <a:endParaRPr lang="en-US" sz="1500" dirty="0">
                         <a:latin typeface="Calibri" charset="0"/>
                         <a:ea typeface="Calibri" charset="0"/>
                         <a:cs typeface="Calibri" charset="0"/>
@@ -17695,7 +17695,7 @@
                         <a:buNone/>
                       </a:pPr>
                       <a:r>
-                        <a:rPr lang="en-US" sz="1600" dirty="0">
+                        <a:rPr lang="en-US" sz="1500" dirty="0">
                           <a:solidFill>
                             <a:srgbClr val="1B1B1F"/>
                           </a:solidFill>
@@ -17705,7 +17705,7 @@
                         </a:rPr>
                         <a:t>C1 ⊕ C2</a:t>
                       </a:r>
-                      <a:endParaRPr lang="en-US" sz="1600" dirty="0">
+                      <a:endParaRPr lang="en-US" sz="1500" dirty="0">
                         <a:latin typeface="Calibri" charset="0"/>
                         <a:ea typeface="Calibri" charset="0"/>
                         <a:cs typeface="Calibri" charset="0"/>
@@ -17750,7 +17750,7 @@
                       <a:tailEnd type="none" w="med" len="med"/>
                     </a:lnB>
                     <a:solidFill>
-                      <a:srgbClr val="FFFFFF"/>
+                      <a:srgbClr val="F3E1C3"/>
                     </a:solidFill>
                   </a:tcPr>
                 </a:tc>
@@ -17763,7 +17763,7 @@
                         <a:buNone/>
                       </a:pPr>
                       <a:r>
-                        <a:rPr lang="en-US" sz="1600" dirty="0">
+                        <a:rPr lang="en-US" sz="1500" dirty="0">
                           <a:solidFill>
                             <a:srgbClr val="1B1B1F"/>
                           </a:solidFill>
@@ -17773,7 +17773,7 @@
                         </a:rPr>
                         <a:t>0000 1111 | 0000 1001 | 0000 0001</a:t>
                       </a:r>
-                      <a:endParaRPr lang="en-US" sz="1600" dirty="0">
+                      <a:endParaRPr lang="en-US" sz="1500" dirty="0">
                         <a:latin typeface="Calibri" charset="0"/>
                         <a:ea typeface="Calibri" charset="0"/>
                         <a:cs typeface="Calibri" charset="0"/>
@@ -17818,7 +17818,7 @@
                       <a:tailEnd type="none" w="med" len="med"/>
                     </a:lnB>
                     <a:solidFill>
-                      <a:srgbClr val="FFFFFF"/>
+                      <a:srgbClr val="F3E1C3"/>
                     </a:solidFill>
                   </a:tcPr>
                 </a:tc>
@@ -17831,7 +17831,7 @@
                         <a:buNone/>
                       </a:pPr>
                       <a:r>
-                        <a:rPr lang="en-US" sz="1600" dirty="0">
+                        <a:rPr lang="en-US" sz="1500" dirty="0">
                           <a:solidFill>
                             <a:srgbClr val="1B1B1F"/>
                           </a:solidFill>
@@ -17841,7 +17841,7 @@
                         </a:rPr>
                         <a:t>= M1 ⊕ M2</a:t>
                       </a:r>
-                      <a:endParaRPr lang="en-US" sz="1600" dirty="0">
+                      <a:endParaRPr lang="en-US" sz="1500" dirty="0">
                         <a:latin typeface="Calibri" charset="0"/>
                         <a:ea typeface="Calibri" charset="0"/>
                         <a:cs typeface="Calibri" charset="0"/>
@@ -17886,7 +17886,7 @@
                       <a:tailEnd type="none" w="med" len="med"/>
                     </a:lnB>
                     <a:solidFill>
-                      <a:srgbClr val="FFFFFF"/>
+                      <a:srgbClr val="F3E1C3"/>
                     </a:solidFill>
                   </a:tcPr>
                 </a:tc>
@@ -18790,7 +18790,7 @@
                         <a:buNone/>
                       </a:pPr>
                       <a:r>
-                        <a:rPr lang="en-US" sz="1600" b="1" dirty="0">
+                        <a:rPr lang="en-US" sz="1500" b="1" dirty="0">
                           <a:solidFill>
                             <a:srgbClr val="1B1B1F"/>
                           </a:solidFill>
@@ -18800,7 +18800,7 @@
                         </a:rPr>
                         <a:t>Bits</a:t>
                       </a:r>
-                      <a:endParaRPr lang="en-US" sz="1600" dirty="0">
+                      <a:endParaRPr lang="en-US" sz="1500" dirty="0">
                         <a:latin typeface="Calibri" charset="0"/>
                         <a:ea typeface="Calibri" charset="0"/>
                         <a:cs typeface="Calibri" charset="0"/>
@@ -18858,7 +18858,7 @@
                         <a:buNone/>
                       </a:pPr>
                       <a:r>
-                        <a:rPr lang="en-US" sz="1600" b="1" dirty="0">
+                        <a:rPr lang="en-US" sz="1500" b="1" dirty="0">
                           <a:solidFill>
                             <a:srgbClr val="1B1B1F"/>
                           </a:solidFill>
@@ -18868,7 +18868,7 @@
                         </a:rPr>
                         <a:t>Text</a:t>
                       </a:r>
-                      <a:endParaRPr lang="en-US" sz="1600" dirty="0">
+                      <a:endParaRPr lang="en-US" sz="1500" dirty="0">
                         <a:latin typeface="Calibri" charset="0"/>
                         <a:ea typeface="Calibri" charset="0"/>
                         <a:cs typeface="Calibri" charset="0"/>
@@ -18928,7 +18928,7 @@
                         <a:buNone/>
                       </a:pPr>
                       <a:r>
-                        <a:rPr lang="en-US" sz="1600" dirty="0">
+                        <a:rPr lang="en-US" sz="1500" dirty="0">
                           <a:solidFill>
                             <a:srgbClr val="1B1B1F"/>
                           </a:solidFill>
@@ -18938,7 +18938,7 @@
                         </a:rPr>
                         <a:t>C1 ⊕ C2</a:t>
                       </a:r>
-                      <a:endParaRPr lang="en-US" sz="1600" dirty="0">
+                      <a:endParaRPr lang="en-US" sz="1500" dirty="0">
                         <a:latin typeface="Calibri" charset="0"/>
                         <a:ea typeface="Calibri" charset="0"/>
                         <a:cs typeface="Calibri" charset="0"/>
@@ -18996,7 +18996,7 @@
                         <a:buNone/>
                       </a:pPr>
                       <a:r>
-                        <a:rPr lang="en-US" sz="1600" dirty="0">
+                        <a:rPr lang="en-US" sz="1500" dirty="0">
                           <a:solidFill>
                             <a:srgbClr val="1B1B1F"/>
                           </a:solidFill>
@@ -19006,7 +19006,7 @@
                         </a:rPr>
                         <a:t>0000 1111 | 0000 1001 | 0000 0001</a:t>
                       </a:r>
-                      <a:endParaRPr lang="en-US" sz="1600" dirty="0">
+                      <a:endParaRPr lang="en-US" sz="1500" dirty="0">
                         <a:latin typeface="Calibri" charset="0"/>
                         <a:ea typeface="Calibri" charset="0"/>
                         <a:cs typeface="Calibri" charset="0"/>
@@ -19116,7 +19116,7 @@
                         <a:buNone/>
                       </a:pPr>
                       <a:r>
-                        <a:rPr lang="en-US" sz="1600" dirty="0">
+                        <a:rPr lang="en-US" sz="1500" dirty="0">
                           <a:solidFill>
                             <a:srgbClr val="1B1B1F"/>
                           </a:solidFill>
@@ -19126,7 +19126,7 @@
                         </a:rPr>
                         <a:t>⊕ geraten</a:t>
                       </a:r>
-                      <a:endParaRPr lang="en-US" sz="1600" dirty="0">
+                      <a:endParaRPr lang="en-US" sz="1500" dirty="0">
                         <a:latin typeface="Calibri" charset="0"/>
                         <a:ea typeface="Calibri" charset="0"/>
                         <a:cs typeface="Calibri" charset="0"/>
@@ -19184,7 +19184,7 @@
                         <a:buNone/>
                       </a:pPr>
                       <a:r>
-                        <a:rPr lang="en-US" sz="1600" dirty="0">
+                        <a:rPr lang="en-US" sz="1500" dirty="0">
                           <a:solidFill>
                             <a:srgbClr val="1B1B1F"/>
                           </a:solidFill>
@@ -19194,7 +19194,7 @@
                         </a:rPr>
                         <a:t>0100 1110 | 0100 0101 | 0101 0101</a:t>
                       </a:r>
-                      <a:endParaRPr lang="en-US" sz="1600" dirty="0">
+                      <a:endParaRPr lang="en-US" sz="1500" dirty="0">
                         <a:latin typeface="Calibri" charset="0"/>
                         <a:ea typeface="Calibri" charset="0"/>
                         <a:cs typeface="Calibri" charset="0"/>
@@ -19252,7 +19252,7 @@
                         <a:buNone/>
                       </a:pPr>
                       <a:r>
-                        <a:rPr lang="en-US" sz="1600" dirty="0">
+                        <a:rPr lang="en-US" sz="1500" dirty="0">
                           <a:solidFill>
                             <a:srgbClr val="1B1B1F"/>
                           </a:solidFill>
@@ -19262,7 +19262,7 @@
                         </a:rPr>
                         <a:t>NEU</a:t>
                       </a:r>
-                      <a:endParaRPr lang="en-US" sz="1600" dirty="0">
+                      <a:endParaRPr lang="en-US" sz="1500" dirty="0">
                         <a:latin typeface="Calibri" charset="0"/>
                         <a:ea typeface="Calibri" charset="0"/>
                         <a:cs typeface="Calibri" charset="0"/>
@@ -19322,7 +19322,7 @@
                         <a:buNone/>
                       </a:pPr>
                       <a:r>
-                        <a:rPr lang="en-US" sz="1600" dirty="0">
+                        <a:rPr lang="en-US" sz="1500" dirty="0">
                           <a:solidFill>
                             <a:srgbClr val="1B1B1F"/>
                           </a:solidFill>
@@ -19332,7 +19332,213 @@
                         </a:rPr>
                         <a:t>= M2</a:t>
                       </a:r>
-                      <a:endParaRPr lang="en-US" sz="1600" dirty="0">
+                      <a:endParaRPr lang="en-US" sz="1500" dirty="0">
+                        <a:latin typeface="Calibri" charset="0"/>
+                        <a:ea typeface="Calibri" charset="0"/>
+                        <a:cs typeface="Calibri" charset="0"/>
+                      </a:endParaRPr>
+                    </a:p>
+                  </a:txBody>
+                  <a:tcPr marL="64008" marR="64008" marT="36576" marB="36576" anchor="ctr">
+                    <a:lnL w="9525" cap="flat" cmpd="sng" algn="ctr">
+                      <a:solidFill>
+                        <a:srgbClr val="D8CDB8"/>
+                      </a:solidFill>
+                      <a:prstDash val="solid"/>
+                      <a:round/>
+                      <a:headEnd type="none" w="med" len="med"/>
+                      <a:tailEnd type="none" w="med" len="med"/>
+                    </a:lnL>
+                    <a:lnR w="9525" cap="flat" cmpd="sng" algn="ctr">
+                      <a:solidFill>
+                        <a:srgbClr val="D8CDB8"/>
+                      </a:solidFill>
+                      <a:prstDash val="solid"/>
+                      <a:round/>
+                      <a:headEnd type="none" w="med" len="med"/>
+                      <a:tailEnd type="none" w="med" len="med"/>
+                    </a:lnR>
+                    <a:lnT w="9525" cap="flat" cmpd="sng" algn="ctr">
+                      <a:solidFill>
+                        <a:srgbClr val="D8CDB8"/>
+                      </a:solidFill>
+                      <a:prstDash val="solid"/>
+                      <a:round/>
+                      <a:headEnd type="none" w="med" len="med"/>
+                      <a:tailEnd type="none" w="med" len="med"/>
+                    </a:lnT>
+                    <a:lnB w="9525" cap="flat" cmpd="sng" algn="ctr">
+                      <a:solidFill>
+                        <a:srgbClr val="D8CDB8"/>
+                      </a:solidFill>
+                      <a:prstDash val="solid"/>
+                      <a:round/>
+                      <a:headEnd type="none" w="med" len="med"/>
+                      <a:tailEnd type="none" w="med" len="med"/>
+                    </a:lnB>
+                    <a:solidFill>
+                      <a:srgbClr val="F3E1C3"/>
+                    </a:solidFill>
+                  </a:tcPr>
+                </a:tc>
+                <a:tc>
+                  <a:txBody>
+                    <a:bodyPr/>
+                    <a:lstStyle/>
+                    <a:p>
+                      <a:pPr algn="l" indent="0" marL="0">
+                        <a:buNone/>
+                      </a:pPr>
+                      <a:r>
+                        <a:rPr lang="en-US" sz="1500" dirty="0">
+                          <a:solidFill>
+                            <a:srgbClr val="1B1B1F"/>
+                          </a:solidFill>
+                          <a:latin typeface="Calibri" pitchFamily="34" charset="0"/>
+                          <a:ea typeface="Calibri" pitchFamily="34" charset="-122"/>
+                          <a:cs typeface="Calibri" pitchFamily="34" charset="-120"/>
+                        </a:rPr>
+                        <a:t>0100 0001 | 0100 1100 | 0101 0100</a:t>
+                      </a:r>
+                      <a:endParaRPr lang="en-US" sz="1500" dirty="0">
+                        <a:latin typeface="Calibri" charset="0"/>
+                        <a:ea typeface="Calibri" charset="0"/>
+                        <a:cs typeface="Calibri" charset="0"/>
+                      </a:endParaRPr>
+                    </a:p>
+                  </a:txBody>
+                  <a:tcPr marL="64008" marR="64008" marT="36576" marB="36576" anchor="ctr">
+                    <a:lnL w="9525" cap="flat" cmpd="sng" algn="ctr">
+                      <a:solidFill>
+                        <a:srgbClr val="D8CDB8"/>
+                      </a:solidFill>
+                      <a:prstDash val="solid"/>
+                      <a:round/>
+                      <a:headEnd type="none" w="med" len="med"/>
+                      <a:tailEnd type="none" w="med" len="med"/>
+                    </a:lnL>
+                    <a:lnR w="9525" cap="flat" cmpd="sng" algn="ctr">
+                      <a:solidFill>
+                        <a:srgbClr val="D8CDB8"/>
+                      </a:solidFill>
+                      <a:prstDash val="solid"/>
+                      <a:round/>
+                      <a:headEnd type="none" w="med" len="med"/>
+                      <a:tailEnd type="none" w="med" len="med"/>
+                    </a:lnR>
+                    <a:lnT w="9525" cap="flat" cmpd="sng" algn="ctr">
+                      <a:solidFill>
+                        <a:srgbClr val="D8CDB8"/>
+                      </a:solidFill>
+                      <a:prstDash val="solid"/>
+                      <a:round/>
+                      <a:headEnd type="none" w="med" len="med"/>
+                      <a:tailEnd type="none" w="med" len="med"/>
+                    </a:lnT>
+                    <a:lnB w="9525" cap="flat" cmpd="sng" algn="ctr">
+                      <a:solidFill>
+                        <a:srgbClr val="D8CDB8"/>
+                      </a:solidFill>
+                      <a:prstDash val="solid"/>
+                      <a:round/>
+                      <a:headEnd type="none" w="med" len="med"/>
+                      <a:tailEnd type="none" w="med" len="med"/>
+                    </a:lnB>
+                    <a:solidFill>
+                      <a:srgbClr val="F3E1C3"/>
+                    </a:solidFill>
+                  </a:tcPr>
+                </a:tc>
+                <a:tc>
+                  <a:txBody>
+                    <a:bodyPr/>
+                    <a:lstStyle/>
+                    <a:p>
+                      <a:pPr algn="l" indent="0" marL="0">
+                        <a:buNone/>
+                      </a:pPr>
+                      <a:r>
+                        <a:rPr lang="en-US" sz="1500" dirty="0">
+                          <a:solidFill>
+                            <a:srgbClr val="1B1B1F"/>
+                          </a:solidFill>
+                          <a:latin typeface="Calibri" pitchFamily="34" charset="0"/>
+                          <a:ea typeface="Calibri" pitchFamily="34" charset="-122"/>
+                          <a:cs typeface="Calibri" pitchFamily="34" charset="-120"/>
+                        </a:rPr>
+                        <a:t>ALT ✓</a:t>
+                      </a:r>
+                      <a:endParaRPr lang="en-US" sz="1500" dirty="0">
+                        <a:latin typeface="Calibri" charset="0"/>
+                        <a:ea typeface="Calibri" charset="0"/>
+                        <a:cs typeface="Calibri" charset="0"/>
+                      </a:endParaRPr>
+                    </a:p>
+                  </a:txBody>
+                  <a:tcPr marL="64008" marR="64008" marT="36576" marB="36576" anchor="ctr">
+                    <a:lnL w="9525" cap="flat" cmpd="sng" algn="ctr">
+                      <a:solidFill>
+                        <a:srgbClr val="D8CDB8"/>
+                      </a:solidFill>
+                      <a:prstDash val="solid"/>
+                      <a:round/>
+                      <a:headEnd type="none" w="med" len="med"/>
+                      <a:tailEnd type="none" w="med" len="med"/>
+                    </a:lnL>
+                    <a:lnR w="9525" cap="flat" cmpd="sng" algn="ctr">
+                      <a:solidFill>
+                        <a:srgbClr val="D8CDB8"/>
+                      </a:solidFill>
+                      <a:prstDash val="solid"/>
+                      <a:round/>
+                      <a:headEnd type="none" w="med" len="med"/>
+                      <a:tailEnd type="none" w="med" len="med"/>
+                    </a:lnR>
+                    <a:lnT w="9525" cap="flat" cmpd="sng" algn="ctr">
+                      <a:solidFill>
+                        <a:srgbClr val="D8CDB8"/>
+                      </a:solidFill>
+                      <a:prstDash val="solid"/>
+                      <a:round/>
+                      <a:headEnd type="none" w="med" len="med"/>
+                      <a:tailEnd type="none" w="med" len="med"/>
+                    </a:lnT>
+                    <a:lnB w="9525" cap="flat" cmpd="sng" algn="ctr">
+                      <a:solidFill>
+                        <a:srgbClr val="D8CDB8"/>
+                      </a:solidFill>
+                      <a:prstDash val="solid"/>
+                      <a:round/>
+                      <a:headEnd type="none" w="med" len="med"/>
+                      <a:tailEnd type="none" w="med" len="med"/>
+                    </a:lnB>
+                    <a:solidFill>
+                      <a:srgbClr val="F3E1C3"/>
+                    </a:solidFill>
+                  </a:tcPr>
+                </a:tc>
+              </a:tr>
+              <a:tr h="0">
+                <a:tc>
+                  <a:txBody>
+                    <a:bodyPr/>
+                    <a:lstStyle/>
+                    <a:p>
+                      <a:pPr algn="l" indent="0" marL="0">
+                        <a:buNone/>
+                      </a:pPr>
+                      <a:r>
+                        <a:rPr lang="en-US" sz="1500" dirty="0">
+                          <a:solidFill>
+                            <a:srgbClr val="1B1B1F"/>
+                          </a:solidFill>
+                          <a:latin typeface="Calibri" pitchFamily="34" charset="0"/>
+                          <a:ea typeface="Calibri" pitchFamily="34" charset="-122"/>
+                          <a:cs typeface="Calibri" pitchFamily="34" charset="-120"/>
+                        </a:rPr>
+                        <a:t>⊕ geraten</a:t>
+                      </a:r>
+                      <a:endParaRPr lang="en-US" sz="1500" dirty="0">
                         <a:latin typeface="Calibri" charset="0"/>
                         <a:ea typeface="Calibri" charset="0"/>
                         <a:cs typeface="Calibri" charset="0"/>
@@ -19390,7 +19596,7 @@
                         <a:buNone/>
                       </a:pPr>
                       <a:r>
-                        <a:rPr lang="en-US" sz="1600" dirty="0">
+                        <a:rPr lang="en-US" sz="1500" dirty="0">
                           <a:solidFill>
                             <a:srgbClr val="1B1B1F"/>
                           </a:solidFill>
@@ -19398,9 +19604,9 @@
                           <a:ea typeface="Calibri" pitchFamily="34" charset="-122"/>
                           <a:cs typeface="Calibri" pitchFamily="34" charset="-120"/>
                         </a:rPr>
-                        <a:t>0100 0001 | 0100 1100 | 0101 0100</a:t>
+                        <a:t>0100 1111 | 0101 0011 | 0101 0100</a:t>
                       </a:r>
-                      <a:endParaRPr lang="en-US" sz="1600" dirty="0">
+                      <a:endParaRPr lang="en-US" sz="1500" dirty="0">
                         <a:latin typeface="Calibri" charset="0"/>
                         <a:ea typeface="Calibri" charset="0"/>
                         <a:cs typeface="Calibri" charset="0"/>
@@ -19458,7 +19664,7 @@
                         <a:buNone/>
                       </a:pPr>
                       <a:r>
-                        <a:rPr lang="en-US" sz="1600" dirty="0">
+                        <a:rPr lang="en-US" sz="1500" dirty="0">
                           <a:solidFill>
                             <a:srgbClr val="1B1B1F"/>
                           </a:solidFill>
@@ -19466,9 +19672,9 @@
                           <a:ea typeface="Calibri" pitchFamily="34" charset="-122"/>
                           <a:cs typeface="Calibri" pitchFamily="34" charset="-120"/>
                         </a:rPr>
-                        <a:t>ALT ✓</a:t>
+                        <a:t>OST</a:t>
                       </a:r>
-                      <a:endParaRPr lang="en-US" sz="1600" dirty="0">
+                      <a:endParaRPr lang="en-US" sz="1500" dirty="0">
                         <a:latin typeface="Calibri" charset="0"/>
                         <a:ea typeface="Calibri" charset="0"/>
                         <a:cs typeface="Calibri" charset="0"/>
@@ -19528,7 +19734,7 @@
                         <a:buNone/>
                       </a:pPr>
                       <a:r>
-                        <a:rPr lang="en-US" sz="1600" dirty="0">
+                        <a:rPr lang="en-US" sz="1500" dirty="0">
                           <a:solidFill>
                             <a:srgbClr val="1B1B1F"/>
                           </a:solidFill>
@@ -19536,9 +19742,9 @@
                           <a:ea typeface="Calibri" pitchFamily="34" charset="-122"/>
                           <a:cs typeface="Calibri" pitchFamily="34" charset="-120"/>
                         </a:rPr>
-                        <a:t>⊕ geraten</a:t>
+                        <a:t>= ?</a:t>
                       </a:r>
-                      <a:endParaRPr lang="en-US" sz="1600" dirty="0">
+                      <a:endParaRPr lang="en-US" sz="1500" dirty="0">
                         <a:latin typeface="Calibri" charset="0"/>
                         <a:ea typeface="Calibri" charset="0"/>
                         <a:cs typeface="Calibri" charset="0"/>
@@ -19596,7 +19802,7 @@
                         <a:buNone/>
                       </a:pPr>
                       <a:r>
-                        <a:rPr lang="en-US" sz="1600" dirty="0">
+                        <a:rPr lang="en-US" sz="1500" dirty="0">
                           <a:solidFill>
                             <a:srgbClr val="1B1B1F"/>
                           </a:solidFill>
@@ -19604,9 +19810,9 @@
                           <a:ea typeface="Calibri" pitchFamily="34" charset="-122"/>
                           <a:cs typeface="Calibri" pitchFamily="34" charset="-120"/>
                         </a:rPr>
-                        <a:t>0100 1111 | 0101 0011 | 0101 0100</a:t>
+                        <a:t>0100 0000 | 0101 1010 | 0101 0101</a:t>
                       </a:r>
-                      <a:endParaRPr lang="en-US" sz="1600" dirty="0">
+                      <a:endParaRPr lang="en-US" sz="1500" dirty="0">
                         <a:latin typeface="Calibri" charset="0"/>
                         <a:ea typeface="Calibri" charset="0"/>
                         <a:cs typeface="Calibri" charset="0"/>
@@ -19664,213 +19870,7 @@
                         <a:buNone/>
                       </a:pPr>
                       <a:r>
-                        <a:rPr lang="en-US" sz="1600" dirty="0">
-                          <a:solidFill>
-                            <a:srgbClr val="1B1B1F"/>
-                          </a:solidFill>
-                          <a:latin typeface="Calibri" pitchFamily="34" charset="0"/>
-                          <a:ea typeface="Calibri" pitchFamily="34" charset="-122"/>
-                          <a:cs typeface="Calibri" pitchFamily="34" charset="-120"/>
-                        </a:rPr>
-                        <a:t>OST</a:t>
-                      </a:r>
-                      <a:endParaRPr lang="en-US" sz="1600" dirty="0">
-                        <a:latin typeface="Calibri" charset="0"/>
-                        <a:ea typeface="Calibri" charset="0"/>
-                        <a:cs typeface="Calibri" charset="0"/>
-                      </a:endParaRPr>
-                    </a:p>
-                  </a:txBody>
-                  <a:tcPr marL="64008" marR="64008" marT="36576" marB="36576" anchor="ctr">
-                    <a:lnL w="9525" cap="flat" cmpd="sng" algn="ctr">
-                      <a:solidFill>
-                        <a:srgbClr val="D8CDB8"/>
-                      </a:solidFill>
-                      <a:prstDash val="solid"/>
-                      <a:round/>
-                      <a:headEnd type="none" w="med" len="med"/>
-                      <a:tailEnd type="none" w="med" len="med"/>
-                    </a:lnL>
-                    <a:lnR w="9525" cap="flat" cmpd="sng" algn="ctr">
-                      <a:solidFill>
-                        <a:srgbClr val="D8CDB8"/>
-                      </a:solidFill>
-                      <a:prstDash val="solid"/>
-                      <a:round/>
-                      <a:headEnd type="none" w="med" len="med"/>
-                      <a:tailEnd type="none" w="med" len="med"/>
-                    </a:lnR>
-                    <a:lnT w="9525" cap="flat" cmpd="sng" algn="ctr">
-                      <a:solidFill>
-                        <a:srgbClr val="D8CDB8"/>
-                      </a:solidFill>
-                      <a:prstDash val="solid"/>
-                      <a:round/>
-                      <a:headEnd type="none" w="med" len="med"/>
-                      <a:tailEnd type="none" w="med" len="med"/>
-                    </a:lnT>
-                    <a:lnB w="9525" cap="flat" cmpd="sng" algn="ctr">
-                      <a:solidFill>
-                        <a:srgbClr val="D8CDB8"/>
-                      </a:solidFill>
-                      <a:prstDash val="solid"/>
-                      <a:round/>
-                      <a:headEnd type="none" w="med" len="med"/>
-                      <a:tailEnd type="none" w="med" len="med"/>
-                    </a:lnB>
-                    <a:solidFill>
-                      <a:srgbClr val="FFFFFF"/>
-                    </a:solidFill>
-                  </a:tcPr>
-                </a:tc>
-              </a:tr>
-              <a:tr h="0">
-                <a:tc>
-                  <a:txBody>
-                    <a:bodyPr/>
-                    <a:lstStyle/>
-                    <a:p>
-                      <a:pPr algn="l" indent="0" marL="0">
-                        <a:buNone/>
-                      </a:pPr>
-                      <a:r>
-                        <a:rPr lang="en-US" sz="1600" dirty="0">
-                          <a:solidFill>
-                            <a:srgbClr val="1B1B1F"/>
-                          </a:solidFill>
-                          <a:latin typeface="Calibri" pitchFamily="34" charset="0"/>
-                          <a:ea typeface="Calibri" pitchFamily="34" charset="-122"/>
-                          <a:cs typeface="Calibri" pitchFamily="34" charset="-120"/>
-                        </a:rPr>
-                        <a:t>= ?</a:t>
-                      </a:r>
-                      <a:endParaRPr lang="en-US" sz="1600" dirty="0">
-                        <a:latin typeface="Calibri" charset="0"/>
-                        <a:ea typeface="Calibri" charset="0"/>
-                        <a:cs typeface="Calibri" charset="0"/>
-                      </a:endParaRPr>
-                    </a:p>
-                  </a:txBody>
-                  <a:tcPr marL="64008" marR="64008" marT="36576" marB="36576" anchor="ctr">
-                    <a:lnL w="9525" cap="flat" cmpd="sng" algn="ctr">
-                      <a:solidFill>
-                        <a:srgbClr val="D8CDB8"/>
-                      </a:solidFill>
-                      <a:prstDash val="solid"/>
-                      <a:round/>
-                      <a:headEnd type="none" w="med" len="med"/>
-                      <a:tailEnd type="none" w="med" len="med"/>
-                    </a:lnL>
-                    <a:lnR w="9525" cap="flat" cmpd="sng" algn="ctr">
-                      <a:solidFill>
-                        <a:srgbClr val="D8CDB8"/>
-                      </a:solidFill>
-                      <a:prstDash val="solid"/>
-                      <a:round/>
-                      <a:headEnd type="none" w="med" len="med"/>
-                      <a:tailEnd type="none" w="med" len="med"/>
-                    </a:lnR>
-                    <a:lnT w="9525" cap="flat" cmpd="sng" algn="ctr">
-                      <a:solidFill>
-                        <a:srgbClr val="D8CDB8"/>
-                      </a:solidFill>
-                      <a:prstDash val="solid"/>
-                      <a:round/>
-                      <a:headEnd type="none" w="med" len="med"/>
-                      <a:tailEnd type="none" w="med" len="med"/>
-                    </a:lnT>
-                    <a:lnB w="9525" cap="flat" cmpd="sng" algn="ctr">
-                      <a:solidFill>
-                        <a:srgbClr val="D8CDB8"/>
-                      </a:solidFill>
-                      <a:prstDash val="solid"/>
-                      <a:round/>
-                      <a:headEnd type="none" w="med" len="med"/>
-                      <a:tailEnd type="none" w="med" len="med"/>
-                    </a:lnB>
-                    <a:solidFill>
-                      <a:srgbClr val="FFFFFF"/>
-                    </a:solidFill>
-                  </a:tcPr>
-                </a:tc>
-                <a:tc>
-                  <a:txBody>
-                    <a:bodyPr/>
-                    <a:lstStyle/>
-                    <a:p>
-                      <a:pPr algn="l" indent="0" marL="0">
-                        <a:buNone/>
-                      </a:pPr>
-                      <a:r>
-                        <a:rPr lang="en-US" sz="1600" dirty="0">
-                          <a:solidFill>
-                            <a:srgbClr val="1B1B1F"/>
-                          </a:solidFill>
-                          <a:latin typeface="Calibri" pitchFamily="34" charset="0"/>
-                          <a:ea typeface="Calibri" pitchFamily="34" charset="-122"/>
-                          <a:cs typeface="Calibri" pitchFamily="34" charset="-120"/>
-                        </a:rPr>
-                        <a:t>0100 0000 | 0101 1010 | 0101 0101</a:t>
-                      </a:r>
-                      <a:endParaRPr lang="en-US" sz="1600" dirty="0">
-                        <a:latin typeface="Calibri" charset="0"/>
-                        <a:ea typeface="Calibri" charset="0"/>
-                        <a:cs typeface="Calibri" charset="0"/>
-                      </a:endParaRPr>
-                    </a:p>
-                  </a:txBody>
-                  <a:tcPr marL="64008" marR="64008" marT="36576" marB="36576" anchor="ctr">
-                    <a:lnL w="9525" cap="flat" cmpd="sng" algn="ctr">
-                      <a:solidFill>
-                        <a:srgbClr val="D8CDB8"/>
-                      </a:solidFill>
-                      <a:prstDash val="solid"/>
-                      <a:round/>
-                      <a:headEnd type="none" w="med" len="med"/>
-                      <a:tailEnd type="none" w="med" len="med"/>
-                    </a:lnL>
-                    <a:lnR w="9525" cap="flat" cmpd="sng" algn="ctr">
-                      <a:solidFill>
-                        <a:srgbClr val="D8CDB8"/>
-                      </a:solidFill>
-                      <a:prstDash val="solid"/>
-                      <a:round/>
-                      <a:headEnd type="none" w="med" len="med"/>
-                      <a:tailEnd type="none" w="med" len="med"/>
-                    </a:lnR>
-                    <a:lnT w="9525" cap="flat" cmpd="sng" algn="ctr">
-                      <a:solidFill>
-                        <a:srgbClr val="D8CDB8"/>
-                      </a:solidFill>
-                      <a:prstDash val="solid"/>
-                      <a:round/>
-                      <a:headEnd type="none" w="med" len="med"/>
-                      <a:tailEnd type="none" w="med" len="med"/>
-                    </a:lnT>
-                    <a:lnB w="9525" cap="flat" cmpd="sng" algn="ctr">
-                      <a:solidFill>
-                        <a:srgbClr val="D8CDB8"/>
-                      </a:solidFill>
-                      <a:prstDash val="solid"/>
-                      <a:round/>
-                      <a:headEnd type="none" w="med" len="med"/>
-                      <a:tailEnd type="none" w="med" len="med"/>
-                    </a:lnB>
-                    <a:solidFill>
-                      <a:srgbClr val="FFFFFF"/>
-                    </a:solidFill>
-                  </a:tcPr>
-                </a:tc>
-                <a:tc>
-                  <a:txBody>
-                    <a:bodyPr/>
-                    <a:lstStyle/>
-                    <a:p>
-                      <a:pPr algn="l" indent="0" marL="0">
-                        <a:buNone/>
-                      </a:pPr>
-                      <a:r>
-                        <a:rPr lang="en-US" sz="1600" dirty="0">
+                        <a:rPr lang="en-US" sz="1500" dirty="0">
                           <a:solidFill>
                             <a:srgbClr val="1B1B1F"/>
                           </a:solidFill>
@@ -19880,7 +19880,7 @@
                         </a:rPr>
                         <a:t>@ZU ✗</a:t>
                       </a:r>
-                      <a:endParaRPr lang="en-US" sz="1600" dirty="0">
+                      <a:endParaRPr lang="en-US" sz="1500" dirty="0">
                         <a:latin typeface="Calibri" charset="0"/>
                         <a:ea typeface="Calibri" charset="0"/>
                         <a:cs typeface="Calibri" charset="0"/>
